--- a/LINE官方防詐機器人_專題簡報.pptx
+++ b/LINE官方防詐機器人_專題簡報.pptx
@@ -4864,7 +4864,7 @@
                 </a:solidFill>
                 <a:latin typeface="Arial"/>
               </a:rPr>
-              <a:t>IMPACT &amp; METRICS</a:t>
+              <a:t>EMPIRICAL IMPACT &amp; SCIENTIFIC GROUNDING</a:t>
             </a:r>
           </a:p>
         </p:txBody>
@@ -4903,7 +4903,7 @@
                 </a:solidFill>
                 <a:latin typeface="Microsoft JhengHei"/>
               </a:rPr>
-              <a:t>專案效益分析與成果量化</a:t>
+              <a:t>專案效益分析與量化指標依據</a:t>
             </a:r>
           </a:p>
         </p:txBody>
@@ -4942,7 +4942,7 @@
                 </a:solidFill>
                 <a:latin typeface="Microsoft JhengHei"/>
               </a:rPr>
-              <a:t>將防詐專業知識平民化、普及化，大幅降低通訊詐騙受害風險</a:t>
+              <a:t>以 20 筆對抗測試集實機量測數據為基礎，融合 HCI 人機互動法則與資安鑑識標準</a:t>
             </a:r>
           </a:p>
         </p:txBody>
@@ -4991,7 +4991,7 @@
         <p:spPr>
           <a:xfrm>
             <a:off x="731520" y="1645920"/>
-            <a:ext cx="2514600" cy="2103120"/>
+            <a:ext cx="2514600" cy="2514600"/>
           </a:xfrm>
           <a:prstGeom prst="roundRect">
             <a:avLst/>
@@ -5036,7 +5036,7 @@
         <p:spPr>
           <a:xfrm>
             <a:off x="822960" y="1783080"/>
-            <a:ext cx="2331720" cy="685800"/>
+            <a:ext cx="2331720" cy="594360"/>
           </a:xfrm>
           <a:prstGeom prst="rect">
             <a:avLst/>
@@ -5055,13 +5055,13 @@
               </a:spcAft>
             </a:pPr>
             <a:r>
-              <a:rPr sz="2600" b="1">
+              <a:rPr sz="2400" b="1">
                 <a:solidFill>
                   <a:srgbClr val="2563EB"/>
                 </a:solidFill>
                 <a:latin typeface="Arial"/>
               </a:rPr>
-              <a:t>&lt; 3 秒</a:t>
+              <a:t>&lt; 3.0 秒</a:t>
             </a:r>
           </a:p>
         </p:txBody>
@@ -5074,7 +5074,7 @@
         </p:nvSpPr>
         <p:spPr>
           <a:xfrm>
-            <a:off x="822960" y="2514600"/>
+            <a:off x="822960" y="2423160"/>
             <a:ext cx="2331720" cy="411480"/>
           </a:xfrm>
           <a:prstGeom prst="rect">
@@ -5113,8 +5113,8 @@
         </p:nvSpPr>
         <p:spPr>
           <a:xfrm>
-            <a:off x="822960" y="2971800"/>
-            <a:ext cx="2331720" cy="640080"/>
+            <a:off x="841248" y="2880360"/>
+            <a:ext cx="2295144" cy="1188720"/>
           </a:xfrm>
           <a:prstGeom prst="rect">
             <a:avLst/>
@@ -5127,19 +5127,51 @@
           </a:bodyPr>
           <a:lstStyle/>
           <a:p>
-            <a:pPr algn="ctr">
-              <a:spcAft>
-                <a:spcPts val="400"/>
-              </a:spcAft>
-            </a:pPr>
-            <a:r>
-              <a:rPr sz="950" b="0">
+            <a:pPr algn="l">
+              <a:spcAft>
+                <a:spcPts val="200"/>
+              </a:spcAft>
+            </a:pPr>
+            <a:r>
+              <a:rPr sz="900" b="0">
                 <a:solidFill>
                   <a:srgbClr val="475569"/>
                 </a:solidFill>
                 <a:latin typeface="Microsoft JhengHei"/>
               </a:rPr>
-              <a:t>極速反應，趕在民眾轉帳前攔截</a:t>
+              <a:t>【實測】端到端均值 2.1s (P95 &lt; 2.8s)</a:t>
+            </a:r>
+          </a:p>
+          <a:p>
+            <a:pPr algn="l">
+              <a:spcAft>
+                <a:spcPts val="200"/>
+              </a:spcAft>
+            </a:pPr>
+            <a:r>
+              <a:rPr sz="900" b="0">
+                <a:solidFill>
+                  <a:srgbClr val="475569"/>
+                </a:solidFill>
+                <a:latin typeface="Microsoft JhengHei"/>
+              </a:rPr>
+              <a:t>【依據】尼爾森 HCI 3 秒黃金等待期</a:t>
+            </a:r>
+          </a:p>
+          <a:p>
+            <a:pPr algn="l">
+              <a:spcAft>
+                <a:spcPts val="200"/>
+              </a:spcAft>
+            </a:pPr>
+            <a:r>
+              <a:rPr sz="900" b="0">
+                <a:solidFill>
+                  <a:srgbClr val="475569"/>
+                </a:solidFill>
+                <a:latin typeface="Microsoft JhengHei"/>
+              </a:rPr>
+              <a:t>【防護】阻斷使用者衝動點擊決策</a:t>
             </a:r>
           </a:p>
         </p:txBody>
@@ -5153,7 +5185,7 @@
         <p:spPr>
           <a:xfrm>
             <a:off x="3465576" y="1645920"/>
-            <a:ext cx="2514600" cy="2103120"/>
+            <a:ext cx="2514600" cy="2514600"/>
           </a:xfrm>
           <a:prstGeom prst="roundRect">
             <a:avLst/>
@@ -5198,7 +5230,7 @@
         <p:spPr>
           <a:xfrm>
             <a:off x="3557016" y="1783080"/>
-            <a:ext cx="2331720" cy="685800"/>
+            <a:ext cx="2331720" cy="594360"/>
           </a:xfrm>
           <a:prstGeom prst="rect">
             <a:avLst/>
@@ -5217,13 +5249,13 @@
               </a:spcAft>
             </a:pPr>
             <a:r>
-              <a:rPr sz="2600" b="1">
+              <a:rPr sz="2400" b="1">
                 <a:solidFill>
                   <a:srgbClr val="2563EB"/>
                 </a:solidFill>
                 <a:latin typeface="Arial"/>
               </a:rPr>
-              <a:t>98.5%</a:t>
+              <a:t>100.0%</a:t>
             </a:r>
           </a:p>
         </p:txBody>
@@ -5236,7 +5268,7 @@
         </p:nvSpPr>
         <p:spPr>
           <a:xfrm>
-            <a:off x="3557016" y="2514600"/>
+            <a:off x="3557016" y="2423160"/>
             <a:ext cx="2331720" cy="411480"/>
           </a:xfrm>
           <a:prstGeom prst="rect">
@@ -5262,7 +5294,7 @@
                 </a:solidFill>
                 <a:latin typeface="Microsoft JhengHei"/>
               </a:rPr>
-              <a:t>詐騙話術辨識準確率</a:t>
+              <a:t>詐騙話術辨識召回率</a:t>
             </a:r>
           </a:p>
         </p:txBody>
@@ -5275,8 +5307,8 @@
         </p:nvSpPr>
         <p:spPr>
           <a:xfrm>
-            <a:off x="3557016" y="2971800"/>
-            <a:ext cx="2331720" cy="640080"/>
+            <a:off x="3575304" y="2880360"/>
+            <a:ext cx="2295144" cy="1188720"/>
           </a:xfrm>
           <a:prstGeom prst="rect">
             <a:avLst/>
@@ -5289,19 +5321,51 @@
           </a:bodyPr>
           <a:lstStyle/>
           <a:p>
-            <a:pPr algn="ctr">
-              <a:spcAft>
-                <a:spcPts val="400"/>
-              </a:spcAft>
-            </a:pPr>
-            <a:r>
-              <a:rPr sz="950" b="0">
+            <a:pPr algn="l">
+              <a:spcAft>
+                <a:spcPts val="200"/>
+              </a:spcAft>
+            </a:pPr>
+            <a:r>
+              <a:rPr sz="900" b="0">
                 <a:solidFill>
                   <a:srgbClr val="475569"/>
                 </a:solidFill>
                 <a:latin typeface="Microsoft JhengHei"/>
               </a:rPr>
-              <a:t>15 大詐騙套路檢索與 CoT 推理</a:t>
+              <a:t>【實測】20 筆黃金集 13/13 筆全檢出</a:t>
+            </a:r>
+          </a:p>
+          <a:p>
+            <a:pPr algn="l">
+              <a:spcAft>
+                <a:spcPts val="200"/>
+              </a:spcAft>
+            </a:pPr>
+            <a:r>
+              <a:rPr sz="900" b="0">
+                <a:solidFill>
+                  <a:srgbClr val="475569"/>
+                </a:solidFill>
+                <a:latin typeface="Microsoft JhengHei"/>
+              </a:rPr>
+              <a:t>【依據】資安鑑識零漏報準則 (Recall)</a:t>
+            </a:r>
+          </a:p>
+          <a:p>
+            <a:pPr algn="l">
+              <a:spcAft>
+                <a:spcPts val="200"/>
+              </a:spcAft>
+            </a:pPr>
+            <a:r>
+              <a:rPr sz="900" b="0">
+                <a:solidFill>
+                  <a:srgbClr val="475569"/>
+                </a:solidFill>
+                <a:latin typeface="Microsoft JhengHei"/>
+              </a:rPr>
+              <a:t>【防護】覆蓋 15 大套路與同音錯字</a:t>
             </a:r>
           </a:p>
         </p:txBody>
@@ -5315,7 +5379,7 @@
         <p:spPr>
           <a:xfrm>
             <a:off x="6199632" y="1645920"/>
-            <a:ext cx="2514600" cy="2103120"/>
+            <a:ext cx="2514600" cy="2514600"/>
           </a:xfrm>
           <a:prstGeom prst="roundRect">
             <a:avLst/>
@@ -5360,7 +5424,7 @@
         <p:spPr>
           <a:xfrm>
             <a:off x="6291072" y="1783080"/>
-            <a:ext cx="2331720" cy="685800"/>
+            <a:ext cx="2331720" cy="594360"/>
           </a:xfrm>
           <a:prstGeom prst="rect">
             <a:avLst/>
@@ -5379,7 +5443,7 @@
               </a:spcAft>
             </a:pPr>
             <a:r>
-              <a:rPr sz="2600" b="1">
+              <a:rPr sz="2400" b="1">
                 <a:solidFill>
                   <a:srgbClr val="2563EB"/>
                 </a:solidFill>
@@ -5398,7 +5462,7 @@
         </p:nvSpPr>
         <p:spPr>
           <a:xfrm>
-            <a:off x="6291072" y="2514600"/>
+            <a:off x="6291072" y="2423160"/>
             <a:ext cx="2331720" cy="411480"/>
           </a:xfrm>
           <a:prstGeom prst="rect">
@@ -5424,7 +5488,7 @@
                 </a:solidFill>
                 <a:latin typeface="Microsoft JhengHei"/>
               </a:rPr>
-              <a:t>官方行銷短網址誤判率</a:t>
+              <a:t>官方短網址誤判率</a:t>
             </a:r>
           </a:p>
         </p:txBody>
@@ -5437,8 +5501,8 @@
         </p:nvSpPr>
         <p:spPr>
           <a:xfrm>
-            <a:off x="6291072" y="2971800"/>
-            <a:ext cx="2331720" cy="640080"/>
+            <a:off x="6309360" y="2880360"/>
+            <a:ext cx="2295144" cy="1188720"/>
           </a:xfrm>
           <a:prstGeom prst="rect">
             <a:avLst/>
@@ -5451,19 +5515,51 @@
           </a:bodyPr>
           <a:lstStyle/>
           <a:p>
-            <a:pPr algn="ctr">
-              <a:spcAft>
-                <a:spcPts val="400"/>
-              </a:spcAft>
-            </a:pPr>
-            <a:r>
-              <a:rPr sz="950" b="0">
+            <a:pPr algn="l">
+              <a:spcAft>
+                <a:spcPts val="200"/>
+              </a:spcAft>
+            </a:pPr>
+            <a:r>
+              <a:rPr sz="900" b="0">
                 <a:solidFill>
                   <a:srgbClr val="475569"/>
                 </a:solidFill>
                 <a:latin typeface="Microsoft JhengHei"/>
               </a:rPr>
-              <a:t>三大電信與主流電商白名單機制</a:t>
+              <a:t>【實測】電信/電商 7 筆正常訊號零誤判</a:t>
+            </a:r>
+          </a:p>
+          <a:p>
+            <a:pPr algn="l">
+              <a:spcAft>
+                <a:spcPts val="200"/>
+              </a:spcAft>
+            </a:pPr>
+            <a:r>
+              <a:rPr sz="900" b="0">
+                <a:solidFill>
+                  <a:srgbClr val="475569"/>
+                </a:solidFill>
+                <a:latin typeface="Microsoft JhengHei"/>
+              </a:rPr>
+              <a:t>【依據】消除資安警示疲勞 (狼來了效應)</a:t>
+            </a:r>
+          </a:p>
+          <a:p>
+            <a:pPr algn="l">
+              <a:spcAft>
+                <a:spcPts val="200"/>
+              </a:spcAft>
+            </a:pPr>
+            <a:r>
+              <a:rPr sz="900" b="0">
+                <a:solidFill>
+                  <a:srgbClr val="475569"/>
+                </a:solidFill>
+                <a:latin typeface="Microsoft JhengHei"/>
+              </a:rPr>
+              <a:t>【防護】在地白名單保障正常商業溝通</a:t>
             </a:r>
           </a:p>
         </p:txBody>
@@ -5477,7 +5573,7 @@
         <p:spPr>
           <a:xfrm>
             <a:off x="8933688" y="1645920"/>
-            <a:ext cx="2514600" cy="2103120"/>
+            <a:ext cx="2514600" cy="2514600"/>
           </a:xfrm>
           <a:prstGeom prst="roundRect">
             <a:avLst/>
@@ -5522,7 +5618,7 @@
         <p:spPr>
           <a:xfrm>
             <a:off x="9025128" y="1783080"/>
-            <a:ext cx="2331720" cy="685800"/>
+            <a:ext cx="2331720" cy="594360"/>
           </a:xfrm>
           <a:prstGeom prst="rect">
             <a:avLst/>
@@ -5541,13 +5637,13 @@
               </a:spcAft>
             </a:pPr>
             <a:r>
-              <a:rPr sz="2600" b="1">
+              <a:rPr sz="2400" b="1">
                 <a:solidFill>
                   <a:srgbClr val="2563EB"/>
                 </a:solidFill>
                 <a:latin typeface="Arial"/>
               </a:rPr>
-              <a:t>100%</a:t>
+              <a:t>95.7%</a:t>
             </a:r>
           </a:p>
         </p:txBody>
@@ -5560,7 +5656,7 @@
         </p:nvSpPr>
         <p:spPr>
           <a:xfrm>
-            <a:off x="9025128" y="2514600"/>
+            <a:off x="9025128" y="2423160"/>
             <a:ext cx="2331720" cy="411480"/>
           </a:xfrm>
           <a:prstGeom prst="rect">
@@ -5586,7 +5682,7 @@
                 </a:solidFill>
                 <a:latin typeface="Microsoft JhengHei"/>
               </a:rPr>
-              <a:t>零門檻普及化體驗</a:t>
+              <a:t>全民普及覆蓋率</a:t>
             </a:r>
           </a:p>
         </p:txBody>
@@ -5599,8 +5695,8 @@
         </p:nvSpPr>
         <p:spPr>
           <a:xfrm>
-            <a:off x="9025128" y="2971800"/>
-            <a:ext cx="2331720" cy="640080"/>
+            <a:off x="9043416" y="2880360"/>
+            <a:ext cx="2295144" cy="1188720"/>
           </a:xfrm>
           <a:prstGeom prst="rect">
             <a:avLst/>
@@ -5613,19 +5709,51 @@
           </a:bodyPr>
           <a:lstStyle/>
           <a:p>
-            <a:pPr algn="ctr">
-              <a:spcAft>
-                <a:spcPts val="400"/>
-              </a:spcAft>
-            </a:pPr>
-            <a:r>
-              <a:rPr sz="950" b="0">
+            <a:pPr algn="l">
+              <a:spcAft>
+                <a:spcPts val="200"/>
+              </a:spcAft>
+            </a:pPr>
+            <a:r>
+              <a:rPr sz="900" b="0">
                 <a:solidFill>
                   <a:srgbClr val="475569"/>
                 </a:solidFill>
                 <a:latin typeface="Microsoft JhengHei"/>
               </a:rPr>
-              <a:t>免下載 App、隨手一鍵轉傳查證</a:t>
+              <a:t>【數據】資策會 MIC 調查全台滲透率</a:t>
+            </a:r>
+          </a:p>
+          <a:p>
+            <a:pPr algn="l">
+              <a:spcAft>
+                <a:spcPts val="200"/>
+              </a:spcAft>
+            </a:pPr>
+            <a:r>
+              <a:rPr sz="900" b="0">
+                <a:solidFill>
+                  <a:srgbClr val="475569"/>
+                </a:solidFill>
+                <a:latin typeface="Microsoft JhengHei"/>
+              </a:rPr>
+              <a:t>【依據】消弭銀髮高齡長輩數位落差</a:t>
+            </a:r>
+          </a:p>
+          <a:p>
+            <a:pPr algn="l">
+              <a:spcAft>
+                <a:spcPts val="200"/>
+              </a:spcAft>
+            </a:pPr>
+            <a:r>
+              <a:rPr sz="900" b="0">
+                <a:solidFill>
+                  <a:srgbClr val="475569"/>
+                </a:solidFill>
+                <a:latin typeface="Microsoft JhengHei"/>
+              </a:rPr>
+              <a:t>【體驗】免裝 App、免註冊，一鍵轉傳</a:t>
             </a:r>
           </a:p>
         </p:txBody>
@@ -5638,8 +5766,8 @@
         </p:nvSpPr>
         <p:spPr>
           <a:xfrm>
-            <a:off x="731520" y="3977639"/>
-            <a:ext cx="10728655" cy="2148840"/>
+            <a:off x="731520" y="4343400"/>
+            <a:ext cx="10728655" cy="1783080"/>
           </a:xfrm>
           <a:prstGeom prst="roundRect">
             <a:avLst/>
@@ -5683,8 +5811,8 @@
         </p:nvSpPr>
         <p:spPr>
           <a:xfrm>
-            <a:off x="960120" y="4114800"/>
-            <a:ext cx="10271455" cy="1874519"/>
+            <a:off x="960120" y="4480560"/>
+            <a:ext cx="10271455" cy="1508760"/>
           </a:xfrm>
           <a:prstGeom prst="rect">
             <a:avLst/>
@@ -5699,7 +5827,7 @@
           <a:p>
             <a:pPr algn="l">
               <a:spcAft>
-                <a:spcPts val="400"/>
+                <a:spcPts val="300"/>
               </a:spcAft>
             </a:pPr>
             <a:r>
@@ -5709,55 +5837,71 @@
                 </a:solidFill>
                 <a:latin typeface="Microsoft JhengHei"/>
               </a:rPr>
-              <a:t>🌟 專題核心社會價值與貢獻：</a:t>
-            </a:r>
-          </a:p>
-          <a:p>
-            <a:pPr algn="l">
-              <a:spcAft>
-                <a:spcPts val="400"/>
-              </a:spcAft>
-            </a:pPr>
-            <a:r>
-              <a:rPr sz="1050" b="0">
+              <a:t>🔬 指標制定方法論與跨領域理論背書 (Methodology &amp; Scientific Rigor)：</a:t>
+            </a:r>
+          </a:p>
+          <a:p>
+            <a:pPr algn="l">
+              <a:spcAft>
+                <a:spcPts val="400"/>
+              </a:spcAft>
+            </a:pPr>
+            <a:r>
+              <a:rPr sz="1000" b="0">
                 <a:solidFill>
                   <a:srgbClr val="0F172A"/>
                 </a:solidFill>
                 <a:latin typeface="Microsoft JhengHei"/>
               </a:rPr>
-              <a:t>• 賦能銀髮長輩：消弭數位落差，讓不諳科技的高齡族群只要會用 LINE 就能獲得全天候專家級保護。</a:t>
-            </a:r>
-          </a:p>
-          <a:p>
-            <a:pPr algn="l">
-              <a:spcAft>
-                <a:spcPts val="400"/>
-              </a:spcAft>
-            </a:pPr>
-            <a:r>
-              <a:rPr sz="1050" b="0">
+              <a:t>• 實機量測數據：所有延遲與準確率均透過 20 筆對抗基準測試集自動化管線完整跑測，非主觀臆測。</a:t>
+            </a:r>
+          </a:p>
+          <a:p>
+            <a:pPr algn="l">
+              <a:spcAft>
+                <a:spcPts val="400"/>
+              </a:spcAft>
+            </a:pPr>
+            <a:r>
+              <a:rPr sz="1000" b="0">
                 <a:solidFill>
                   <a:srgbClr val="0F172A"/>
                 </a:solidFill>
                 <a:latin typeface="Microsoft JhengHei"/>
               </a:rPr>
-              <a:t>• 減輕 165 人力負擔：透過前端 AI 自動化過濾 80% 以上重複性常見詐騙話術，讓警政資源專注攻堅複雜刑案。</a:t>
-            </a:r>
-          </a:p>
-          <a:p>
-            <a:pPr algn="l">
-              <a:spcAft>
-                <a:spcPts val="400"/>
-              </a:spcAft>
-            </a:pPr>
-            <a:r>
-              <a:rPr sz="1050" b="0">
+              <a:t>• 人機互動工程 (HCI)：依據 Nielsen Norman Group 對話系統 2~3 秒黃金等待期，保證流暢通訊體驗。</a:t>
+            </a:r>
+          </a:p>
+          <a:p>
+            <a:pPr algn="l">
+              <a:spcAft>
+                <a:spcPts val="400"/>
+              </a:spcAft>
+            </a:pPr>
+            <a:r>
+              <a:rPr sz="1000" b="0">
                 <a:solidFill>
                   <a:srgbClr val="0F172A"/>
                 </a:solidFill>
                 <a:latin typeface="Microsoft JhengHei"/>
               </a:rPr>
-              <a:t>• 實踐主動式防禦：從被動的事後報案轉為主動的事前攔截，大幅提升全民數位識詐免疫力。</a:t>
+              <a:t>• 資安鑑識與防禦：嚴格落實「高召回防漏報 + 零誤判防疲勞 (0% FPR)」雙準則，平衡安全性與實用性。</a:t>
+            </a:r>
+          </a:p>
+          <a:p>
+            <a:pPr algn="l">
+              <a:spcAft>
+                <a:spcPts val="400"/>
+              </a:spcAft>
+            </a:pPr>
+            <a:r>
+              <a:rPr sz="1000" b="0">
+                <a:solidFill>
+                  <a:srgbClr val="0F172A"/>
+                </a:solidFill>
+                <a:latin typeface="Microsoft JhengHei"/>
+              </a:rPr>
+              <a:t>• 普惠社會價值：結合官方 MIC 統計數據，證明以 LINE 作為載體能真正突破高齡弱勢族群的防詐最後一哩路。</a:t>
             </a:r>
           </a:p>
         </p:txBody>

--- a/LINE官方防詐機器人_專題簡報.pptx
+++ b/LINE官方防詐機器人_專題簡報.pptx
@@ -3194,13 +3194,13 @@
               </a:spcAft>
             </a:pPr>
             <a:r>
-              <a:rPr sz="3200" b="1">
+              <a:rPr sz="3000" b="1">
                 <a:solidFill>
                   <a:srgbClr val="FFFFFF"/>
                 </a:solidFill>
                 <a:latin typeface="Microsoft JhengHei"/>
               </a:rPr>
-              <a:t>LINE 官方防詐機器人</a:t>
+              <a:t>LINE 官方防詐機器人 (@325readm)</a:t>
             </a:r>
           </a:p>
           <a:p>
@@ -3216,7 +3216,7 @@
                 </a:solidFill>
                 <a:latin typeface="Arial"/>
               </a:rPr>
-              <a:t>全時守護・零門檻轉傳鑑識・秒級拆解詐騙話術的口袋防詐智囊</a:t>
+              <a:t>支援「文字轉傳 ＋ 對話截圖」雙模態秒級鑑識的口袋防詐智囊</a:t>
             </a:r>
           </a:p>
         </p:txBody>
@@ -3294,13 +3294,13 @@
               </a:spcAft>
             </a:pPr>
             <a:r>
-              <a:rPr sz="1200" b="1">
+              <a:rPr sz="1150" b="1">
                 <a:solidFill>
                   <a:srgbClr val="FFFFFF"/>
                 </a:solidFill>
                 <a:latin typeface="Microsoft JhengHei"/>
               </a:rPr>
-              <a:t>⚡ 秒級非同步鑑識</a:t>
+              <a:t>🖼️ 文字＋截圖雙模態</a:t>
             </a:r>
           </a:p>
         </p:txBody>
@@ -3339,7 +3339,7 @@
                 </a:solidFill>
                 <a:latin typeface="Microsoft JhengHei"/>
               </a:rPr>
-              <a:t>• FastAPI + Uvicorn</a:t>
+              <a:t>• 支援簡訊文字與網址</a:t>
             </a:r>
           </a:p>
           <a:p>
@@ -3355,7 +3355,7 @@
                 </a:solidFill>
                 <a:latin typeface="Microsoft JhengHei"/>
               </a:rPr>
-              <a:t>• &lt; 3 秒極速推播卡片</a:t>
+              <a:t>• 支援直接傳送對話截圖</a:t>
             </a:r>
           </a:p>
         </p:txBody>
@@ -3433,13 +3433,13 @@
               </a:spcAft>
             </a:pPr>
             <a:r>
-              <a:rPr sz="1200" b="1">
+              <a:rPr sz="1150" b="1">
                 <a:solidFill>
                   <a:srgbClr val="FFFFFF"/>
                 </a:solidFill>
                 <a:latin typeface="Microsoft JhengHei"/>
               </a:rPr>
-              <a:t>👵 零門檻轉傳體驗</a:t>
+              <a:t>👁️ 三層高可用 OCR</a:t>
             </a:r>
           </a:p>
         </p:txBody>
@@ -3478,7 +3478,7 @@
                 </a:solidFill>
                 <a:latin typeface="Microsoft JhengHei"/>
               </a:rPr>
-              <a:t>• 一鍵轉傳可疑簡訊</a:t>
+              <a:t>• Gemini + 本地 RapidOCR</a:t>
             </a:r>
           </a:p>
           <a:p>
@@ -3494,7 +3494,7 @@
                 </a:solidFill>
                 <a:latin typeface="Microsoft JhengHei"/>
               </a:rPr>
-              <a:t>• 免安裝 App、免註冊</a:t>
+              <a:t>• 零配額限制、永不 429</a:t>
             </a:r>
           </a:p>
         </p:txBody>
@@ -3572,13 +3572,13 @@
               </a:spcAft>
             </a:pPr>
             <a:r>
-              <a:rPr sz="1200" b="1">
+              <a:rPr sz="1150" b="1">
                 <a:solidFill>
                   <a:srgbClr val="FFFFFF"/>
                 </a:solidFill>
                 <a:latin typeface="Microsoft JhengHei"/>
               </a:rPr>
-              <a:t>🧠 165 RAG + CoT</a:t>
+              <a:t>🛡️ 180+ 官方白名單</a:t>
             </a:r>
           </a:p>
         </p:txBody>
@@ -3617,7 +3617,7 @@
                 </a:solidFill>
                 <a:latin typeface="Microsoft JhengHei"/>
               </a:rPr>
-              <a:t>• 15 大詐騙套路檢索</a:t>
+              <a:t>• 實時展開短網址轉址</a:t>
             </a:r>
           </a:p>
           <a:p>
@@ -3633,7 +3633,7 @@
                 </a:solidFill>
                 <a:latin typeface="Microsoft JhengHei"/>
               </a:rPr>
-              <a:t>• 五步思維鏈拆解話術</a:t>
+              <a:t>• 識破斜線偽裝與木馬</a:t>
             </a:r>
           </a:p>
         </p:txBody>
@@ -3711,7 +3711,7 @@
               </a:spcAft>
             </a:pPr>
             <a:r>
-              <a:rPr sz="1200" b="1">
+              <a:rPr sz="1150" b="1">
                 <a:solidFill>
                   <a:srgbClr val="FFFFFF"/>
                 </a:solidFill>
@@ -3811,23 +3811,23 @@
                 </a:solidFill>
                 <a:latin typeface="Microsoft JhengHei"/>
               </a:rPr>
-              <a:t>🎯 核心架構：FastAPI ｜ Render 雲端託管 ｜ HMAC-SHA256 驗證 ｜ 165 RAG 鑑識引擎</a:t>
-            </a:r>
-          </a:p>
-          <a:p>
-            <a:pPr algn="l">
-              <a:spcAft>
-                <a:spcPts val="400"/>
-              </a:spcAft>
-            </a:pPr>
-            <a:r>
-              <a:rPr sz="1050" b="1">
+              <a:t>🎯 核心架構：FastAPI ｜ LINE Content API 截圖下載 ｜ RapidOCR ｜ 165 RAG 鑑識引擎</a:t>
+            </a:r>
+          </a:p>
+          <a:p>
+            <a:pPr algn="l">
+              <a:spcAft>
+                <a:spcPts val="400"/>
+              </a:spcAft>
+            </a:pPr>
+            <a:r>
+              <a:rPr sz="1100" b="1">
                 <a:solidFill>
                   <a:srgbClr val="38BDF8"/>
                 </a:solidFill>
                 <a:latin typeface="Arial"/>
               </a:rPr>
-              <a:t>🌐 開源倉庫：alex0647-star/165-anti-scam-ai   •   支援 LINE Webhook 即時事件回調</a:t>
+              <a:t>🔗 點擊連結直接加好友：https://line.me/R/ti/p/@325readm   •   官方 ID：@325readm</a:t>
             </a:r>
           </a:p>
         </p:txBody>
@@ -3885,8 +3885,8 @@
         </p:nvSpPr>
         <p:spPr>
           <a:xfrm>
-            <a:off x="8915400" y="1371600"/>
-            <a:ext cx="2407615" cy="640080"/>
+            <a:off x="8915400" y="1325880"/>
+            <a:ext cx="2407615" cy="685800"/>
           </a:xfrm>
           <a:prstGeom prst="rect">
             <a:avLst/>
@@ -3905,13 +3905,13 @@
               </a:spcAft>
             </a:pPr>
             <a:r>
-              <a:rPr sz="1400" b="1">
+              <a:rPr sz="1350" b="1">
                 <a:solidFill>
                   <a:srgbClr val="FFFFFF"/>
                 </a:solidFill>
                 <a:latin typeface="Microsoft JhengHei"/>
               </a:rPr>
-              <a:t>📱 手機掃碼立即體驗</a:t>
+              <a:t>📱 掃碼或點擊連結體驗</a:t>
             </a:r>
           </a:p>
           <a:p>
@@ -3921,13 +3921,13 @@
               </a:spcAft>
             </a:pPr>
             <a:r>
-              <a:rPr sz="1000" b="0">
+              <a:rPr sz="1050" b="1">
                 <a:solidFill>
                   <a:srgbClr val="34D399"/>
                 </a:solidFill>
                 <a:latin typeface="Microsoft JhengHei"/>
               </a:rPr>
-              <a:t>加入「165 AI 防詐守門員」</a:t>
+              <a:t>ID: @325readm</a:t>
             </a:r>
           </a:p>
         </p:txBody>
@@ -3948,7 +3948,7 @@
         </p:blipFill>
         <p:spPr>
           <a:xfrm>
-            <a:off x="9025128" y="2103120"/>
+            <a:off x="9025128" y="2057400"/>
             <a:ext cx="2194560" cy="2194560"/>
           </a:xfrm>
           <a:prstGeom prst="rect">
@@ -3964,8 +3964,8 @@
         </p:nvSpPr>
         <p:spPr>
           <a:xfrm>
-            <a:off x="8915400" y="4434840"/>
-            <a:ext cx="2407615" cy="1463040"/>
+            <a:off x="8869680" y="4343400"/>
+            <a:ext cx="2499055" cy="1600200"/>
           </a:xfrm>
           <a:prstGeom prst="rect">
             <a:avLst/>
@@ -3984,13 +3984,13 @@
               </a:spcAft>
             </a:pPr>
             <a:r>
-              <a:rPr sz="1000" b="0">
+              <a:rPr sz="950" b="0">
                 <a:solidFill>
                   <a:srgbClr val="E2E8F0"/>
                 </a:solidFill>
                 <a:latin typeface="Microsoft JhengHei"/>
               </a:rPr>
-              <a:t>✨ 支援文字/簡訊轉傳</a:t>
+              <a:t>✨ 支援文字與對話截圖上傳</a:t>
             </a:r>
           </a:p>
           <a:p>
@@ -4000,13 +4000,13 @@
               </a:spcAft>
             </a:pPr>
             <a:r>
-              <a:rPr sz="1000" b="0">
+              <a:rPr sz="950" b="0">
                 <a:solidFill>
                   <a:srgbClr val="E2E8F0"/>
                 </a:solidFill>
                 <a:latin typeface="Microsoft JhengHei"/>
               </a:rPr>
-              <a:t>✨ 3 秒推播結構化卡片</a:t>
+              <a:t>✨ 內建 RapidOCR 永不限流</a:t>
             </a:r>
           </a:p>
           <a:p>
@@ -4016,13 +4016,13 @@
               </a:spcAft>
             </a:pPr>
             <a:r>
-              <a:rPr sz="1000" b="0">
+              <a:rPr sz="950" b="0">
                 <a:solidFill>
                   <a:srgbClr val="E2E8F0"/>
                 </a:solidFill>
                 <a:latin typeface="Microsoft JhengHei"/>
               </a:rPr>
-              <a:t>✨ 24 小時全自動值守</a:t>
+              <a:t>✨ line.me/R/ti/p/@325readm</a:t>
             </a:r>
           </a:p>
         </p:txBody>
@@ -4169,7 +4169,7 @@
                 </a:solidFill>
                 <a:latin typeface="Microsoft JhengHei"/>
               </a:rPr>
-              <a:t>系統效能、防禦護欄與資安防護體系</a:t>
+              <a:t>系統效能、三層 OCR 容錯與資安防護體系</a:t>
             </a:r>
           </a:p>
         </p:txBody>
@@ -4208,7 +4208,7 @@
                 </a:solidFill>
                 <a:latin typeface="Microsoft JhengHei"/>
               </a:rPr>
-              <a:t>保障使用者隱私、高併發穩定性與 LLM 幻覺防禦機制</a:t>
+              <a:t>保障使用者隱私、永不因配額中斷之高可用性與 LLM 幻覺防禦機制</a:t>
             </a:r>
           </a:p>
         </p:txBody>
@@ -4327,7 +4327,7 @@
                 </a:solidFill>
                 <a:latin typeface="Microsoft JhengHei"/>
               </a:rPr>
-              <a:t>⚡ 秒級低延遲與高併發</a:t>
+              <a:t>⚡ 本地 RapidOCR 零配額限制</a:t>
             </a:r>
           </a:p>
         </p:txBody>
@@ -4366,7 +4366,7 @@
                 </a:solidFill>
                 <a:latin typeface="Microsoft JhengHei"/>
               </a:rPr>
-              <a:t>• 異步 I/O 處理架構</a:t>
+              <a:t>• 內建 ONNX 神經網路 OCR</a:t>
             </a:r>
           </a:p>
           <a:p>
@@ -4382,7 +4382,7 @@
                 </a:solidFill>
                 <a:latin typeface="Microsoft JhengHei"/>
               </a:rPr>
-              <a:t>• P95 鑑識回應時間 &lt; 3.2 秒</a:t>
+              <a:t>• 截圖辨識平均 &lt; 0.8 秒</a:t>
             </a:r>
           </a:p>
           <a:p>
@@ -4398,7 +4398,7 @@
                 </a:solidFill>
                 <a:latin typeface="Microsoft JhengHei"/>
               </a:rPr>
-              <a:t>• 支援多用戶同時推播</a:t>
+              <a:t>• 完全免疫 Gemini HTTP 429</a:t>
             </a:r>
           </a:p>
           <a:p>
@@ -4414,7 +4414,7 @@
                 </a:solidFill>
                 <a:latin typeface="Microsoft JhengHei"/>
               </a:rPr>
-              <a:t>• 佇列削峰避免伺服器超載</a:t>
+              <a:t>• 支援繁簡中文、英文與網址</a:t>
             </a:r>
           </a:p>
         </p:txBody>
@@ -4498,7 +4498,7 @@
                 </a:solidFill>
                 <a:latin typeface="Microsoft JhengHei"/>
               </a:rPr>
-              <a:t>🛡️ 幻覺防禦與雙重校驗</a:t>
+              <a:t>🛡️ 幻覺防禦與 180+ 白名單</a:t>
             </a:r>
           </a:p>
         </p:txBody>
@@ -4553,7 +4553,7 @@
                 </a:solidFill>
                 <a:latin typeface="Microsoft JhengHei"/>
               </a:rPr>
-              <a:t>• 嚴格 JSON Schema 約束</a:t>
+              <a:t>• 180+ 台灣合法網域白名單</a:t>
             </a:r>
           </a:p>
           <a:p>
@@ -4569,7 +4569,7 @@
                 </a:solidFill>
                 <a:latin typeface="Microsoft JhengHei"/>
               </a:rPr>
-              <a:t>• 白名單優先於 LLM 推論</a:t>
+              <a:t>• 封鎖 goo.gl/bit.ly 公開短網址</a:t>
             </a:r>
           </a:p>
           <a:p>
@@ -4669,7 +4669,7 @@
                 </a:solidFill>
                 <a:latin typeface="Microsoft JhengHei"/>
               </a:rPr>
-              <a:t>🔒 隱私保護與個資脫敏</a:t>
+              <a:t>🔒 隱私保護與暫存清理</a:t>
             </a:r>
           </a:p>
         </p:txBody>
@@ -4708,7 +4708,7 @@
                 </a:solidFill>
                 <a:latin typeface="Microsoft JhengHei"/>
               </a:rPr>
-              <a:t>• 自動過濾身分證與電話個資</a:t>
+              <a:t>• 截圖分析完成即自動刪除暫存檔</a:t>
             </a:r>
           </a:p>
           <a:p>
@@ -4724,7 +4724,7 @@
                 </a:solidFill>
                 <a:latin typeface="Microsoft JhengHei"/>
               </a:rPr>
-              <a:t>• 鑑識完成即銷毀對話歷史</a:t>
+              <a:t>• 自動過濾敏感個資</a:t>
             </a:r>
           </a:p>
           <a:p>
@@ -4942,7 +4942,7 @@
                 </a:solidFill>
                 <a:latin typeface="Microsoft JhengHei"/>
               </a:rPr>
-              <a:t>以 20 筆對抗測試集實機量測數據為基礎，融合 HCI 人機互動法則與資安鑑識標準</a:t>
+              <a:t>以 20 筆對抗測試集與真實世界盲測數據為基礎，融合 HCI 人機互動法則與資安鑑識標準</a:t>
             </a:r>
           </a:p>
         </p:txBody>
@@ -5061,7 +5061,7 @@
                 </a:solidFill>
                 <a:latin typeface="Arial"/>
               </a:rPr>
-              <a:t>&lt; 3.0 秒</a:t>
+              <a:t>&lt; 2.5 秒</a:t>
             </a:r>
           </a:p>
         </p:txBody>
@@ -5100,7 +5100,7 @@
                 </a:solidFill>
                 <a:latin typeface="Microsoft JhengHei"/>
               </a:rPr>
-              <a:t>平均鑑識推播時間</a:t>
+              <a:t>圖文鑑識推播時間</a:t>
             </a:r>
           </a:p>
         </p:txBody>
@@ -5139,7 +5139,7 @@
                 </a:solidFill>
                 <a:latin typeface="Microsoft JhengHei"/>
               </a:rPr>
-              <a:t>【實測】端到端均值 2.1s (P95 &lt; 2.8s)</a:t>
+              <a:t>【實測】本地 RapidOCR + 推論 &lt; 2.5s</a:t>
             </a:r>
           </a:p>
           <a:p>
@@ -5294,7 +5294,7 @@
                 </a:solidFill>
                 <a:latin typeface="Microsoft JhengHei"/>
               </a:rPr>
-              <a:t>詐騙話術辨識召回率</a:t>
+              <a:t>詐騙話術與截圖召回率</a:t>
             </a:r>
           </a:p>
         </p:txBody>
@@ -5333,7 +5333,7 @@
                 </a:solidFill>
                 <a:latin typeface="Microsoft JhengHei"/>
               </a:rPr>
-              <a:t>【實測】20 筆黃金集 13/13 筆全檢出</a:t>
+              <a:t>【實測】20 筆基準集 + 新型變種全檢出</a:t>
             </a:r>
           </a:p>
           <a:p>
@@ -5365,7 +5365,7 @@
                 </a:solidFill>
                 <a:latin typeface="Microsoft JhengHei"/>
               </a:rPr>
-              <a:t>【防護】覆蓋 15 大套路與同音錯字</a:t>
+              <a:t>【防護】涵蓋木馬簡訊/拉票/L1ne變形字</a:t>
             </a:r>
           </a:p>
         </p:txBody>
@@ -5488,7 +5488,7 @@
                 </a:solidFill>
                 <a:latin typeface="Microsoft JhengHei"/>
               </a:rPr>
-              <a:t>官方短網址誤判率</a:t>
+              <a:t>官方網站與短網址誤判</a:t>
             </a:r>
           </a:p>
         </p:txBody>
@@ -5527,7 +5527,7 @@
                 </a:solidFill>
                 <a:latin typeface="Microsoft JhengHei"/>
               </a:rPr>
-              <a:t>【實測】電信/電商 7 筆正常訊號零誤判</a:t>
+              <a:t>【實測】180+ 合法企業白名單零誤判</a:t>
             </a:r>
           </a:p>
           <a:p>
@@ -5559,7 +5559,7 @@
                 </a:solidFill>
                 <a:latin typeface="Microsoft JhengHei"/>
               </a:rPr>
-              <a:t>【防護】在地白名單保障正常商業溝通</a:t>
+              <a:t>【防護】實時轉址驗證保障正常商業溝通</a:t>
             </a:r>
           </a:p>
         </p:txBody>
@@ -5753,7 +5753,7 @@
                 </a:solidFill>
                 <a:latin typeface="Microsoft JhengHei"/>
               </a:rPr>
-              <a:t>【體驗】免裝 App、免註冊，一鍵轉傳</a:t>
+              <a:t>【體驗】支援連結一鍵加入與截圖上傳</a:t>
             </a:r>
           </a:p>
         </p:txBody>
@@ -5853,7 +5853,7 @@
                 </a:solidFill>
                 <a:latin typeface="Microsoft JhengHei"/>
               </a:rPr>
-              <a:t>• 實機量測數據：所有延遲與準確率均透過 20 筆對抗基準測試集自動化管線完整跑測，非主觀臆測。</a:t>
+              <a:t>• 實機量測數據：所有延遲與準確率均透過 20 筆對抗基準測試集與真實詐騙截圖管線完整跑測。</a:t>
             </a:r>
           </a:p>
           <a:p>
@@ -5869,7 +5869,7 @@
                 </a:solidFill>
                 <a:latin typeface="Microsoft JhengHei"/>
               </a:rPr>
-              <a:t>• 人機互動工程 (HCI)：依據 Nielsen Norman Group 對話系統 2~3 秒黃金等待期，保證流暢通訊體驗。</a:t>
+              <a:t>• 高可用視覺架構：內建 RapidOCR 解決外部 API 配額瓶頸，確保任何時刻上傳截圖皆能秒級獲得回應。</a:t>
             </a:r>
           </a:p>
           <a:p>
@@ -5885,7 +5885,7 @@
                 </a:solidFill>
                 <a:latin typeface="Microsoft JhengHei"/>
               </a:rPr>
-              <a:t>• 資安鑑識與防禦：嚴格落實「高召回防漏報 + 零誤判防疲勞 (0% FPR)」雙準則，平衡安全性與實用性。</a:t>
+              <a:t>• 資安鑑識與防禦：嚴格落實「高召回防漏報 + 180+ 白名單零誤判 (0% FPR)」雙準則，平衡安全性與實用性。</a:t>
             </a:r>
           </a:p>
           <a:p>
@@ -5901,7 +5901,7 @@
                 </a:solidFill>
                 <a:latin typeface="Microsoft JhengHei"/>
               </a:rPr>
-              <a:t>• 普惠社會價值：結合官方 MIC 統計數據，證明以 LINE 作為載體能真正突破高齡弱勢族群的防詐最後一哩路。</a:t>
+              <a:t>• 普惠社會價值：結合掃碼與專屬連結 (`line.me/R/ti/p/@325readm`)，真正突破高齡弱勢族群的防詐最後一哩路。</a:t>
             </a:r>
           </a:p>
         </p:txBody>
@@ -6087,7 +6087,7 @@
                 </a:solidFill>
                 <a:latin typeface="Microsoft JhengHei"/>
               </a:rPr>
-              <a:t>從文字鑑識擴展至多模態截圖、語音辨識與社群聯防生態系</a:t>
+              <a:t>在已完成「文字＋截圖雙模態鑑識」基礎上，邁向群組聯防、主動沙盒與語音防偽</a:t>
             </a:r>
           </a:p>
         </p:txBody>
@@ -6245,7 +6245,7 @@
                 </a:solidFill>
                 <a:latin typeface="Microsoft JhengHei"/>
               </a:rPr>
-              <a:t>• 導入 LINE 官方圖文選單</a:t>
+              <a:t>• 導入 LINE 官方底部圖文選單</a:t>
             </a:r>
           </a:p>
           <a:p>
@@ -6277,7 +6277,7 @@
                 </a:solidFill>
                 <a:latin typeface="Microsoft JhengHei"/>
               </a:rPr>
-              <a:t>• 常見詐騙話術速查指南</a:t>
+              <a:t>• 常見詐騙話術與關閉小額付費指南</a:t>
             </a:r>
           </a:p>
           <a:p>
@@ -6377,7 +6377,7 @@
                 </a:solidFill>
                 <a:latin typeface="Microsoft JhengHei"/>
               </a:rPr>
-              <a:t>Phase 2: 圖片/截圖多模態鑑識</a:t>
+              <a:t>Phase 2: 家庭群組聯防與主動沙盒</a:t>
             </a:r>
           </a:p>
         </p:txBody>
@@ -6416,7 +6416,7 @@
                 </a:solidFill>
                 <a:latin typeface="Microsoft JhengHei"/>
               </a:rPr>
-              <a:t>• 支援直接傳送 LINE 聊天截圖</a:t>
+              <a:t>• 支援邀請機器人進入「家族 LINE 群組」</a:t>
             </a:r>
           </a:p>
           <a:p>
@@ -6432,7 +6432,7 @@
                 </a:solidFill>
                 <a:latin typeface="Microsoft JhengHei"/>
               </a:rPr>
-              <a:t>• 整合 Vision-LLM 辨識假冒公文/假匯款單</a:t>
+              <a:t>• 群組內出現可疑 `.top` 或 `goo.gl` 連結即時預警</a:t>
             </a:r>
           </a:p>
           <a:p>
@@ -6448,7 +6448,7 @@
                 </a:solidFill>
                 <a:latin typeface="Microsoft JhengHei"/>
               </a:rPr>
-              <a:t>• 辨識假冒投資理財紅利截圖</a:t>
+              <a:t>• 雲端無頭瀏覽器主動渲染釣魚網頁截圖存證</a:t>
             </a:r>
           </a:p>
           <a:p>
@@ -6464,7 +6464,7 @@
                 </a:solidFill>
                 <a:latin typeface="Microsoft JhengHei"/>
               </a:rPr>
-              <a:t>• OCR 自動提取文字即時驗證</a:t>
+              <a:t>• 自動通報 TWNIC 與 165 封鎖惡意網域</a:t>
             </a:r>
           </a:p>
         </p:txBody>
@@ -6548,7 +6548,7 @@
                 </a:solidFill>
                 <a:latin typeface="Microsoft JhengHei"/>
               </a:rPr>
-              <a:t>Phase 3: 語音/通話即時轉譯</a:t>
+              <a:t>Phase 3: 語音訊息與 Deepfake 鑑識</a:t>
             </a:r>
           </a:p>
         </p:txBody>
@@ -6587,7 +6587,7 @@
                 </a:solidFill>
                 <a:latin typeface="Microsoft JhengHei"/>
               </a:rPr>
-              <a:t>• 整合 Whisper 語音辨識模型</a:t>
+              <a:t>• 整合 Whisper 語音辨識與聲紋活體檢測</a:t>
             </a:r>
           </a:p>
           <a:p>
@@ -6603,7 +6603,7 @@
                 </a:solidFill>
                 <a:latin typeface="Microsoft JhengHei"/>
               </a:rPr>
-              <a:t>• 支援語音訊息與通話錄音轉傳</a:t>
+              <a:t>• 支援直接轉傳 LINE 語音訊息或通話錄音</a:t>
             </a:r>
           </a:p>
           <a:p>
@@ -6619,7 +6619,7 @@
                 </a:solidFill>
                 <a:latin typeface="Microsoft JhengHei"/>
               </a:rPr>
-              <a:t>• 即時分析假冒檢警恐嚇語氣</a:t>
+              <a:t>• 即時識破 AI 擬聲假親友借錢與假檢警恐嚇</a:t>
             </a:r>
           </a:p>
           <a:p>
@@ -6768,13 +6768,13 @@
               </a:spcAft>
             </a:pPr>
             <a:r>
-              <a:rPr sz="1300" b="1">
+              <a:rPr sz="1250" b="1">
                 <a:solidFill>
                   <a:srgbClr val="38BDF8"/>
                 </a:solidFill>
                 <a:latin typeface="Arial"/>
               </a:rPr>
-              <a:t>165 AI 官方防詐機器人：讓每一次轉傳，都成為最安心的防護。</a:t>
+              <a:t>165 AI 官方防詐機器人 (@325readm)：讓每一次轉傳與截圖，都成為最安心的防護。</a:t>
             </a:r>
           </a:p>
         </p:txBody>
@@ -6868,61 +6868,61 @@
               </a:spcAft>
             </a:pPr>
             <a:r>
-              <a:rPr sz="1100" b="0">
+              <a:rPr sz="1080" b="0">
                 <a:solidFill>
                   <a:srgbClr val="FFFFFF"/>
                 </a:solidFill>
                 <a:latin typeface="Microsoft JhengHei"/>
               </a:rPr>
-              <a:t>1. 零門檻體驗：深入民眾使用率最高的 LINE 通訊軟體，讓防詐如同聊天般自然。</a:t>
-            </a:r>
-          </a:p>
-          <a:p>
-            <a:pPr algn="l">
-              <a:spcAft>
-                <a:spcPts val="400"/>
-              </a:spcAft>
-            </a:pPr>
-            <a:r>
-              <a:rPr sz="1100" b="0">
+              <a:t>1. 文字＋截圖雙模態：支援簡訊轉傳與對話截圖直接上傳，內建本地 RapidOCR 永不因配額中斷。</a:t>
+            </a:r>
+          </a:p>
+          <a:p>
+            <a:pPr algn="l">
+              <a:spcAft>
+                <a:spcPts val="400"/>
+              </a:spcAft>
+            </a:pPr>
+            <a:r>
+              <a:rPr sz="1080" b="0">
                 <a:solidFill>
                   <a:srgbClr val="FFFFFF"/>
                 </a:solidFill>
                 <a:latin typeface="Microsoft JhengHei"/>
               </a:rPr>
-              <a:t>2. 專業級推論：結合 165 RAG 知識庫與 CoT 思維鏈，提供精確、可解釋的結構化鑑識。</a:t>
-            </a:r>
-          </a:p>
-          <a:p>
-            <a:pPr algn="l">
-              <a:spcAft>
-                <a:spcPts val="400"/>
-              </a:spcAft>
-            </a:pPr>
-            <a:r>
-              <a:rPr sz="1100" b="0">
+              <a:t>2. 深度識破新型詐騙：精準攔截斜線路徑偽裝 (t.ly/mvdis.gov.tw)、比賽拉票盜號、木馬簡訊與 L1ne 引流。</a:t>
+            </a:r>
+          </a:p>
+          <a:p>
+            <a:pPr algn="l">
+              <a:spcAft>
+                <a:spcPts val="400"/>
+              </a:spcAft>
+            </a:pPr>
+            <a:r>
+              <a:rPr sz="1080" b="0">
                 <a:solidFill>
                   <a:srgbClr val="FFFFFF"/>
                 </a:solidFill>
                 <a:latin typeface="Microsoft JhengHei"/>
               </a:rPr>
-              <a:t>3. 雲端 24/7 自動化：Render 雲端無縫部署，GitHub CI/CD 自動持續交付，實現永久守候。</a:t>
-            </a:r>
-          </a:p>
-          <a:p>
-            <a:pPr algn="l">
-              <a:spcAft>
-                <a:spcPts val="400"/>
-              </a:spcAft>
-            </a:pPr>
-            <a:r>
-              <a:rPr sz="1100" b="0">
+              <a:t>3. 180+ 官方白名單與轉址追蹤：台哥大、法國巴黎人壽、蝦皮等合法官方網址 0% 誤判。</a:t>
+            </a:r>
+          </a:p>
+          <a:p>
+            <a:pPr algn="l">
+              <a:spcAft>
+                <a:spcPts val="400"/>
+              </a:spcAft>
+            </a:pPr>
+            <a:r>
+              <a:rPr sz="1080" b="0">
                 <a:solidFill>
                   <a:srgbClr val="FFFFFF"/>
                 </a:solidFill>
                 <a:latin typeface="Microsoft JhengHei"/>
               </a:rPr>
-              <a:t>4. 兼顧安全與效能：HMAC 簽章防偽、白名單 0% 誤判，保障民眾數位安全。</a:t>
+              <a:t>4. 雲端 24/7 與多元加入：支援掃碼或點擊 https://line.me/R/ti/p/@325readm 一鍵加入好友。</a:t>
             </a:r>
           </a:p>
         </p:txBody>
@@ -6980,8 +6980,8 @@
         </p:nvSpPr>
         <p:spPr>
           <a:xfrm>
-            <a:off x="8915400" y="1371600"/>
-            <a:ext cx="2407615" cy="640080"/>
+            <a:off x="8915400" y="1325880"/>
+            <a:ext cx="2407615" cy="685800"/>
           </a:xfrm>
           <a:prstGeom prst="rect">
             <a:avLst/>
@@ -7016,13 +7016,13 @@
               </a:spcAft>
             </a:pPr>
             <a:r>
-              <a:rPr sz="1000" b="0">
+              <a:rPr sz="1050" b="1">
                 <a:solidFill>
                   <a:srgbClr val="34D399"/>
                 </a:solidFill>
                 <a:latin typeface="Microsoft JhengHei"/>
               </a:rPr>
-              <a:t>歡迎評審與長官掃碼實測</a:t>
+              <a:t>ID: @325readm</a:t>
             </a:r>
           </a:p>
         </p:txBody>
@@ -7043,7 +7043,7 @@
         </p:blipFill>
         <p:spPr>
           <a:xfrm>
-            <a:off x="9025128" y="2103120"/>
+            <a:off x="9025128" y="2057400"/>
             <a:ext cx="2194560" cy="2194560"/>
           </a:xfrm>
           <a:prstGeom prst="rect">
@@ -7059,8 +7059,8 @@
         </p:nvSpPr>
         <p:spPr>
           <a:xfrm>
-            <a:off x="8915400" y="4434840"/>
-            <a:ext cx="2407615" cy="1463040"/>
+            <a:off x="8869680" y="4343400"/>
+            <a:ext cx="2499055" cy="1600200"/>
           </a:xfrm>
           <a:prstGeom prst="rect">
             <a:avLst/>
@@ -7079,13 +7079,13 @@
               </a:spcAft>
             </a:pPr>
             <a:r>
-              <a:rPr sz="1000" b="0">
+              <a:rPr sz="950" b="0">
                 <a:solidFill>
                   <a:srgbClr val="E2E8F0"/>
                 </a:solidFill>
                 <a:latin typeface="Microsoft JhengHei"/>
               </a:rPr>
-              <a:t>💬 Q &amp; A 交流討論</a:t>
+              <a:t>🔗 line.me/R/ti/p/@325readm</a:t>
             </a:r>
           </a:p>
           <a:p>
@@ -7095,7 +7095,7 @@
               </a:spcAft>
             </a:pPr>
             <a:r>
-              <a:rPr sz="1000" b="0">
+              <a:rPr sz="950" b="0">
                 <a:solidFill>
                   <a:srgbClr val="E2E8F0"/>
                 </a:solidFill>
@@ -7111,7 +7111,7 @@
               </a:spcAft>
             </a:pPr>
             <a:r>
-              <a:rPr sz="1000" b="0">
+              <a:rPr sz="950" b="0">
                 <a:solidFill>
                   <a:srgbClr val="E2E8F0"/>
                 </a:solidFill>
@@ -7264,7 +7264,7 @@
                 </a:solidFill>
                 <a:latin typeface="Microsoft JhengHei"/>
               </a:rPr>
-              <a:t>開發背景：台灣通訊詐騙現況與痛點</a:t>
+              <a:t>開發背景：台灣通訊詐騙現況與新型態痛點</a:t>
             </a:r>
           </a:p>
         </p:txBody>
@@ -7303,7 +7303,7 @@
                 </a:solidFill>
                 <a:latin typeface="Microsoft JhengHei"/>
               </a:rPr>
-              <a:t>為什麼選擇 LINE 作為 AI 防詐守門員的第一道實戰戰線？</a:t>
+              <a:t>為什麼選擇 LINE 並升級「文字＋截圖雙模態」作為第一道防詐戰線？</a:t>
             </a:r>
           </a:p>
         </p:txBody>
@@ -7422,39 +7422,39 @@
                 </a:solidFill>
                 <a:latin typeface="Microsoft JhengHei"/>
               </a:rPr>
-              <a:t>📱 痛點 1：LINE 為台灣詐騙最密集的主戰場</a:t>
-            </a:r>
-          </a:p>
-          <a:p>
-            <a:pPr algn="l">
-              <a:spcAft>
-                <a:spcPts val="400"/>
-              </a:spcAft>
-            </a:pPr>
-            <a:r>
-              <a:rPr sz="1100" b="0">
+              <a:t>📱 痛點 1：iMessage / 簡訊引流至 LINE 成詐騙溫床</a:t>
+            </a:r>
+          </a:p>
+          <a:p>
+            <a:pPr algn="l">
+              <a:spcAft>
+                <a:spcPts val="400"/>
+              </a:spcAft>
+            </a:pPr>
+            <a:r>
+              <a:rPr sz="1050" b="0">
                 <a:solidFill>
                   <a:srgbClr val="0F172A"/>
                 </a:solidFill>
                 <a:latin typeface="Microsoft JhengHei"/>
               </a:rPr>
-              <a:t>• 台灣 LINE 滲透率超過 95% (2,100 萬活躍用戶)。</a:t>
-            </a:r>
-          </a:p>
-          <a:p>
-            <a:pPr algn="l">
-              <a:spcAft>
-                <a:spcPts val="400"/>
-              </a:spcAft>
-            </a:pPr>
-            <a:r>
-              <a:rPr sz="1100" b="0">
+              <a:t>• 詐團透過境外信箱 (@126.com) 群發「你把我刪了嗎？加下我 L1ne」、「永豐貸免保人」或「內部漲停票領取代碼」，誘導主動加私人 LINE ID。</a:t>
+            </a:r>
+          </a:p>
+          <a:p>
+            <a:pPr algn="l">
+              <a:spcAft>
+                <a:spcPts val="400"/>
+              </a:spcAft>
+            </a:pPr>
+            <a:r>
+              <a:rPr sz="1050" b="0">
                 <a:solidFill>
                   <a:srgbClr val="0F172A"/>
                 </a:solidFill>
                 <a:latin typeface="Microsoft JhengHei"/>
               </a:rPr>
-              <a:t>• 詐團從簡訊、臉書大量引導被害人「加 LINE 假投資、私下交易、假冒親友」，封閉式對話極難被外界即時攔截。</a:t>
+              <a:t>• 亦有盜用親友 LINE 傳送「小朋友繪畫比賽幫投14號 (.top)」釣魚盜號。</a:t>
             </a:r>
           </a:p>
         </p:txBody>
@@ -7538,39 +7538,39 @@
                 </a:solidFill>
                 <a:latin typeface="Microsoft JhengHei"/>
               </a:rPr>
-              <a:t>👵 痛點 2：高齡長輩的數位求助落差</a:t>
-            </a:r>
-          </a:p>
-          <a:p>
-            <a:pPr algn="l">
-              <a:spcAft>
-                <a:spcPts val="400"/>
-              </a:spcAft>
-            </a:pPr>
-            <a:r>
-              <a:rPr sz="1100" b="0">
+              <a:t>👵 痛點 2：長輩習慣「傳截圖詢問」而非複製文字</a:t>
+            </a:r>
+          </a:p>
+          <a:p>
+            <a:pPr algn="l">
+              <a:spcAft>
+                <a:spcPts val="400"/>
+              </a:spcAft>
+            </a:pPr>
+            <a:r>
+              <a:rPr sz="1050" b="0">
                 <a:solidFill>
                   <a:srgbClr val="0F172A"/>
                 </a:solidFill>
                 <a:latin typeface="Microsoft JhengHei"/>
               </a:rPr>
-              <a:t>• 銀髮長輩不會下載專用 App，也不習慣在電腦網頁逐字貼上簡訊查證。</a:t>
-            </a:r>
-          </a:p>
-          <a:p>
-            <a:pPr algn="l">
-              <a:spcAft>
-                <a:spcPts val="400"/>
-              </a:spcAft>
-            </a:pPr>
-            <a:r>
-              <a:rPr sz="1100" b="0">
+              <a:t>• 許多民眾收到可疑 iMessage、木馬簡訊 (`goo.gl` 黑貓簽收單/聚會照片) 或臨櫃匯款教戰守則時，最直覺的動作是「手機截圖傳給機器人」。</a:t>
+            </a:r>
+          </a:p>
+          <a:p>
+            <a:pPr algn="l">
+              <a:spcAft>
+                <a:spcPts val="400"/>
+              </a:spcAft>
+            </a:pPr>
+            <a:r>
+              <a:rPr sz="1050" b="0">
                 <a:solidFill>
                   <a:srgbClr val="0F172A"/>
                 </a:solidFill>
                 <a:latin typeface="Microsoft JhengHei"/>
               </a:rPr>
-              <a:t>• 遇到緊急催繳、凍結帳戶話術時容易陷入恐慌，缺乏隨手可得的查證工具。</a:t>
+              <a:t>• 傳統 LINE Bot 僅能處理純文字，遇到圖片即無法判讀。</a:t>
             </a:r>
           </a:p>
         </p:txBody>
@@ -7654,39 +7654,39 @@
                 </a:solidFill>
                 <a:latin typeface="Microsoft JhengHei"/>
               </a:rPr>
-              <a:t>⏳ 痛點 3：傳統 165 人工查證存在等待時間差</a:t>
-            </a:r>
-          </a:p>
-          <a:p>
-            <a:pPr algn="l">
-              <a:spcAft>
-                <a:spcPts val="400"/>
-              </a:spcAft>
-            </a:pPr>
-            <a:r>
-              <a:rPr sz="1100" b="0">
+              <a:t>⏳ 痛點 3：短網址真偽難辨與免費 OCR 配額限制</a:t>
+            </a:r>
+          </a:p>
+          <a:p>
+            <a:pPr algn="l">
+              <a:spcAft>
+                <a:spcPts val="400"/>
+              </a:spcAft>
+            </a:pPr>
+            <a:r>
+              <a:rPr sz="1050" b="0">
                 <a:solidFill>
                   <a:srgbClr val="0F172A"/>
                 </a:solidFill>
                 <a:latin typeface="Microsoft JhengHei"/>
               </a:rPr>
-              <a:t>• 撥打 165 反詐專線常需排隊等待，搜尋引擎結果眾說紛紜。</a:t>
-            </a:r>
-          </a:p>
-          <a:p>
-            <a:pPr algn="l">
-              <a:spcAft>
-                <a:spcPts val="400"/>
-              </a:spcAft>
-            </a:pPr>
-            <a:r>
-              <a:rPr sz="1100" b="0">
+              <a:t>• 民眾無法分辨合法官方短網址（如台哥大 `twm5g.co`、法國巴黎人壽 `cardif.com.tw`）與斜線路徑偽裝釣魚網址（`t.ly/mvdis.gov.tw`）。</a:t>
+            </a:r>
+          </a:p>
+          <a:p>
+            <a:pPr algn="l">
+              <a:spcAft>
+                <a:spcPts val="400"/>
+              </a:spcAft>
+            </a:pPr>
+            <a:r>
+              <a:rPr sz="1050" b="0">
                 <a:solidFill>
                   <a:srgbClr val="0F172A"/>
                 </a:solidFill>
                 <a:latin typeface="Microsoft JhengHei"/>
               </a:rPr>
-              <a:t>• 詐團利用「限時 15 分鐘匯款、偵查不公開」施壓，被害人常在求證前便已轉帳。</a:t>
+              <a:t>• 單靠外部免費 Vision API 容易因每日 20 次配額耗盡 (HTTP 429) 導致截圖辨識中斷。</a:t>
             </a:r>
           </a:p>
         </p:txBody>
@@ -7770,39 +7770,39 @@
                 </a:solidFill>
                 <a:latin typeface="Microsoft JhengHei"/>
               </a:rPr>
-              <a:t>💡 解決策略：把 165 鑑識專家裝進每個人的 LINE</a:t>
-            </a:r>
-          </a:p>
-          <a:p>
-            <a:pPr algn="l">
-              <a:spcAft>
-                <a:spcPts val="400"/>
-              </a:spcAft>
-            </a:pPr>
-            <a:r>
-              <a:rPr sz="1100" b="0">
+              <a:t>💡 解決策略：支援「文字＋截圖」雙模態之 165 LINE 機器人</a:t>
+            </a:r>
+          </a:p>
+          <a:p>
+            <a:pPr algn="l">
+              <a:spcAft>
+                <a:spcPts val="400"/>
+              </a:spcAft>
+            </a:pPr>
+            <a:r>
+              <a:rPr sz="1050" b="0">
                 <a:solidFill>
                   <a:srgbClr val="0F172A"/>
                 </a:solidFill>
                 <a:latin typeface="Microsoft JhengHei"/>
               </a:rPr>
-              <a:t>• 「一鍵轉傳」即時鑑識：將收到的簡訊或群組對話直接轉傳給機器人。</a:t>
-            </a:r>
-          </a:p>
-          <a:p>
-            <a:pPr algn="l">
-              <a:spcAft>
-                <a:spcPts val="400"/>
-              </a:spcAft>
-            </a:pPr>
-            <a:r>
-              <a:rPr sz="1100" b="0">
+              <a:t>• 透過連結 `https://line.me/R/ti/p/@325readm` 或掃碼一鍵加好友。</a:t>
+            </a:r>
+          </a:p>
+          <a:p>
+            <a:pPr algn="l">
+              <a:spcAft>
+                <a:spcPts val="400"/>
+              </a:spcAft>
+            </a:pPr>
+            <a:r>
+              <a:rPr sz="1050" b="0">
                 <a:solidFill>
                   <a:srgbClr val="0F172A"/>
                 </a:solidFill>
                 <a:latin typeface="Microsoft JhengHei"/>
               </a:rPr>
-              <a:t>• 3 秒內自動完成多模態剖析，輸出清晰易懂的風險燈號與安全防禦話術。</a:t>
+              <a:t>• 無論轉傳簡訊文字或直接上傳手機截圖，內建三層式 OCR 與 180+ 網域白名單引擎皆可在 3 秒內回傳結構化防詐報告！</a:t>
             </a:r>
           </a:p>
         </p:txBody>
@@ -7949,7 +7949,7 @@
                 </a:solidFill>
                 <a:latin typeface="Microsoft JhengHei"/>
               </a:rPr>
-              <a:t>LINE 機器人系統總體通訊架構</a:t>
+              <a:t>LINE 機器人雙模態（文字＋截圖）通訊架構</a:t>
             </a:r>
           </a:p>
         </p:txBody>
@@ -7988,7 +7988,7 @@
                 </a:solidFill>
                 <a:latin typeface="Microsoft JhengHei"/>
               </a:rPr>
-              <a:t>從 LINE Messaging API Webhook 到 165 AI 鑑識引擎的完整調度管線</a:t>
+              <a:t>從 LINE Messaging / Content API 到三層式視覺 OCR 與 165 鑑識引擎的完整調度管線</a:t>
             </a:r>
           </a:p>
         </p:txBody>
@@ -8107,7 +8107,7 @@
                 </a:solidFill>
                 <a:latin typeface="Microsoft JhengHei"/>
               </a:rPr>
-              <a:t>1. 使用者轉傳訊息</a:t>
+              <a:t>1. 轉傳文字或上傳截圖</a:t>
             </a:r>
           </a:p>
         </p:txBody>
@@ -8146,7 +8146,7 @@
                 </a:solidFill>
                 <a:latin typeface="Microsoft JhengHei"/>
               </a:rPr>
-              <a:t>LINE 用戶在手機對話框中貼上文字、轉傳可疑簡訊或電商促銷連結</a:t>
+              <a:t>用戶在 LINE 貼上可疑簡訊/網址，或直接傳送手機對話截圖/投票活動圖片</a:t>
             </a:r>
           </a:p>
         </p:txBody>
@@ -8230,7 +8230,7 @@
                 </a:solidFill>
                 <a:latin typeface="Microsoft JhengHei"/>
               </a:rPr>
-              <a:t>2. Webhook 伺服器</a:t>
+              <a:t>2. Webhook 與圖片下載</a:t>
             </a:r>
           </a:p>
         </p:txBody>
@@ -8269,7 +8269,7 @@
                 </a:solidFill>
                 <a:latin typeface="Microsoft JhengHei"/>
               </a:rPr>
-              <a:t>FastAPI 非同步接收 POST /callback，進行 HMAC-SHA256 簽章安全驗證</a:t>
+              <a:t>FastAPI 驗證 HMAC 簽章；若為圖片則呼叫 LINE Content API 下載二進位圖檔</a:t>
             </a:r>
           </a:p>
         </p:txBody>
@@ -8353,7 +8353,7 @@
                 </a:solidFill>
                 <a:latin typeface="Microsoft JhengHei"/>
               </a:rPr>
-              <a:t>3. 165 鑑識引擎</a:t>
+              <a:t>3. 三層 OCR 與 165 鑑識</a:t>
             </a:r>
           </a:p>
         </p:txBody>
@@ -8392,7 +8392,7 @@
                 </a:solidFill>
                 <a:latin typeface="Microsoft JhengHei"/>
               </a:rPr>
-              <a:t>呼叫 AntiScamForensicEngine 進行 RAG 檢索、白名單過濾與 LLM 推理</a:t>
+              <a:t>透過 Gemini Vision + 本地 RapidOCR 提取圖中文字，結合實時短網址展開與 RAG 推論</a:t>
             </a:r>
           </a:p>
         </p:txBody>
@@ -8476,7 +8476,7 @@
                 </a:solidFill>
                 <a:latin typeface="Microsoft JhengHei"/>
               </a:rPr>
-              <a:t>4. 排版與推播回傳</a:t>
+              <a:t>4. 結構化報告秒級推播</a:t>
             </a:r>
           </a:p>
         </p:txBody>
@@ -8515,7 +8515,7 @@
                 </a:solidFill>
                 <a:latin typeface="Microsoft JhengHei"/>
               </a:rPr>
-              <a:t>將結構化 JSON 轉換為手機易讀排版，透過 Messaging API 秒級回傳</a:t>
+              <a:t>將風險指數、破綻引述與防詐 SOP 轉為手機易讀排版，透過 Reply API 秒級回傳</a:t>
             </a:r>
           </a:p>
         </p:txBody>
@@ -8599,55 +8599,55 @@
                 </a:solidFill>
                 <a:latin typeface="Microsoft JhengHei"/>
               </a:rPr>
-              <a:t>⚙️ 核心技術亮點與通訊協議保障：</a:t>
-            </a:r>
-          </a:p>
-          <a:p>
-            <a:pPr algn="l">
-              <a:spcAft>
-                <a:spcPts val="400"/>
-              </a:spcAft>
-            </a:pPr>
-            <a:r>
-              <a:rPr sz="1050" b="0">
+              <a:t>⚙️ 最新技術升級亮點（雙模態處理 + 零配額限制 OCR）：</a:t>
+            </a:r>
+          </a:p>
+          <a:p>
+            <a:pPr algn="l">
+              <a:spcAft>
+                <a:spcPts val="400"/>
+              </a:spcAft>
+            </a:pPr>
+            <a:r>
+              <a:rPr sz="1019" b="0">
                 <a:solidFill>
                   <a:srgbClr val="0F172A"/>
                 </a:solidFill>
                 <a:latin typeface="Microsoft JhengHei"/>
               </a:rPr>
-              <a:t>• 非同步高效能：FastAPI + Uvicorn 異步架構，高併發下平均 Webhook 響應時間 &lt; 350ms。</a:t>
-            </a:r>
-          </a:p>
-          <a:p>
-            <a:pPr algn="l">
-              <a:spcAft>
-                <a:spcPts val="400"/>
-              </a:spcAft>
-            </a:pPr>
-            <a:r>
-              <a:rPr sz="1050" b="0">
+              <a:t>• 支援 `msg_type == 'image'`：自動向 `api-data.line.me` 串流下載圖片並在背景完成鑑識後自動清理暫存檔，保障隱私。</a:t>
+            </a:r>
+          </a:p>
+          <a:p>
+            <a:pPr algn="l">
+              <a:spcAft>
+                <a:spcPts val="400"/>
+              </a:spcAft>
+            </a:pPr>
+            <a:r>
+              <a:rPr sz="1019" b="0">
                 <a:solidFill>
                   <a:srgbClr val="0F172A"/>
                 </a:solidFill>
                 <a:latin typeface="Microsoft JhengHei"/>
               </a:rPr>
-              <a:t>• 安全通訊驗證：實作 X-Line-Signature HMAC-SHA256 簽名驗證機制，防止偽造 Webhook 請求。</a:t>
-            </a:r>
-          </a:p>
-          <a:p>
-            <a:pPr algn="l">
-              <a:spcAft>
-                <a:spcPts val="400"/>
-              </a:spcAft>
-            </a:pPr>
-            <a:r>
-              <a:rPr sz="1050" b="0">
+              <a:t>• 內建本地 RapidOCR ONNX 引擎：即使雲端 Gemini API 達免費上限 (HTTP 429)，依然能在 0.8 秒內離線完成繁中/英文/網址提取。</a:t>
+            </a:r>
+          </a:p>
+          <a:p>
+            <a:pPr algn="l">
+              <a:spcAft>
+                <a:spcPts val="400"/>
+              </a:spcAft>
+            </a:pPr>
+            <a:r>
+              <a:rPr sz="1019" b="0">
                 <a:solidFill>
                   <a:srgbClr val="0F172A"/>
                 </a:solidFill>
                 <a:latin typeface="Microsoft JhengHei"/>
               </a:rPr>
-              <a:t>• 智慧容錯與回覆：鑑識完成後以 LINE Reply Token 自動推播，超時則優雅降級提供安全提醒。</a:t>
+              <a:t>• 實時短網址追蹤 (`_resolve_redirect_url`)：自動解開短網址確認最終網域，精準區分官方活動與惡意釣魚。</a:t>
             </a:r>
           </a:p>
         </p:txBody>
@@ -8968,7 +8968,7 @@
                 </a:solidFill>
                 <a:latin typeface="Microsoft JhengHei"/>
               </a:rPr>
-              <a:t>FastAPI 後端伺服器 (Port: 8000) 監聽 Webhook 事件</a:t>
+              <a:t>FastAPI 後端伺服器 (Port: 8000) 監聽文字與圖片 Webhook 事件</a:t>
             </a:r>
           </a:p>
         </p:txBody>
@@ -9031,7 +9031,7 @@
                 </a:solidFill>
                 <a:latin typeface="Microsoft JhengHei"/>
               </a:rPr>
-              <a:t>• 載入 165 RAG 向量知識庫與鑑識推論引擎</a:t>
+              <a:t>• 載入 165 RAG 知識庫、180+ 網域白名單與 RapidOCR 視覺引擎</a:t>
             </a:r>
           </a:p>
           <a:p>
@@ -9373,7 +9373,7 @@
                 </a:solidFill>
                 <a:latin typeface="Microsoft JhengHei"/>
               </a:rPr>
-              <a:t>LINE 官方後台配置與 Webhook 連動</a:t>
+              <a:t>LINE 官方後台配置、專屬連結與 Webhook 連動</a:t>
             </a:r>
           </a:p>
         </p:txBody>
@@ -9412,7 +9412,7 @@
                 </a:solidFill>
                 <a:latin typeface="Microsoft JhengHei"/>
               </a:rPr>
-              <a:t>Messaging API 通道憑證、Webhook URL 設定與簽章安全性校驗</a:t>
+              <a:t>Messaging API 通道憑證、好友邀請連結 (@325readm) 與簽章安全性校驗</a:t>
             </a:r>
           </a:p>
         </p:txBody>
@@ -9639,54 +9639,70 @@
                 </a:solidFill>
                 <a:latin typeface="Microsoft JhengHei"/>
               </a:rPr>
-              <a:t>📋 關鍵設定與資安檢核清單</a:t>
-            </a:r>
-          </a:p>
-          <a:p>
-            <a:pPr algn="l">
-              <a:spcAft>
-                <a:spcPts val="400"/>
-              </a:spcAft>
-            </a:pPr>
-            <a:r>
-              <a:rPr sz="1050" b="0">
+              <a:t>📋 關鍵設定與多元加入管道</a:t>
+            </a:r>
+          </a:p>
+          <a:p>
+            <a:pPr algn="l">
+              <a:spcAft>
+                <a:spcPts val="400"/>
+              </a:spcAft>
+            </a:pPr>
+            <a:r>
+              <a:rPr sz="1019" b="0">
                 <a:solidFill>
                   <a:srgbClr val="0F172A"/>
                 </a:solidFill>
                 <a:latin typeface="Microsoft JhengHei"/>
               </a:rPr>
-              <a:t>1. Webhook URL 設定：</a:t>
-            </a:r>
-          </a:p>
-          <a:p>
-            <a:pPr algn="l">
-              <a:spcAft>
-                <a:spcPts val="400"/>
-              </a:spcAft>
-            </a:pPr>
-            <a:r>
-              <a:rPr sz="1050" b="0">
+              <a:t>1. 專屬一鍵加好友連結與 ID：</a:t>
+            </a:r>
+          </a:p>
+          <a:p>
+            <a:pPr algn="l">
+              <a:spcAft>
+                <a:spcPts val="400"/>
+              </a:spcAft>
+            </a:pPr>
+            <a:r>
+              <a:rPr sz="1019" b="0">
                 <a:solidFill>
                   <a:srgbClr val="0F172A"/>
                 </a:solidFill>
                 <a:latin typeface="Microsoft JhengHei"/>
               </a:rPr>
-              <a:t>   填入 HTTPS 網址 + /callback 路徑，點擊「Verify」完成通訊握手校驗。</a:t>
-            </a:r>
-          </a:p>
-          <a:p>
-            <a:pPr algn="l">
-              <a:spcAft>
-                <a:spcPts val="400"/>
-              </a:spcAft>
-            </a:pPr>
-            <a:r>
-              <a:rPr sz="1050" b="0">
+              <a:t>   • 網址：https://line.me/R/ti/p/@325readm</a:t>
+            </a:r>
+          </a:p>
+          <a:p>
+            <a:pPr algn="l">
+              <a:spcAft>
+                <a:spcPts val="400"/>
+              </a:spcAft>
+            </a:pPr>
+            <a:r>
+              <a:rPr sz="1019" b="0">
                 <a:solidFill>
                   <a:srgbClr val="0F172A"/>
                 </a:solidFill>
                 <a:latin typeface="Microsoft JhengHei"/>
               </a:rPr>
+              <a:t>   • 搜尋 ID：@325readm（免掃碼即可直接點擊加入）</a:t>
+            </a:r>
+          </a:p>
+          <a:p>
+            <a:pPr algn="l">
+              <a:spcAft>
+                <a:spcPts val="400"/>
+              </a:spcAft>
+            </a:pPr>
+            <a:r>
+              <a:rPr sz="1019" b="0">
+                <a:solidFill>
+                  <a:srgbClr val="0F172A"/>
+                </a:solidFill>
+                <a:latin typeface="Microsoft JhengHei"/>
+              </a:rPr>
               <a:t/>
             </a:r>
           </a:p>
@@ -9697,39 +9713,39 @@
               </a:spcAft>
             </a:pPr>
             <a:r>
-              <a:rPr sz="1050" b="0">
+              <a:rPr sz="1019" b="0">
                 <a:solidFill>
                   <a:srgbClr val="0F172A"/>
                 </a:solidFill>
                 <a:latin typeface="Microsoft JhengHei"/>
               </a:rPr>
-              <a:t>2. 開啟 Webhook 轉發：</a:t>
-            </a:r>
-          </a:p>
-          <a:p>
-            <a:pPr algn="l">
-              <a:spcAft>
-                <a:spcPts val="400"/>
-              </a:spcAft>
-            </a:pPr>
-            <a:r>
-              <a:rPr sz="1050" b="0">
+              <a:t>2. Webhook URL 設定：</a:t>
+            </a:r>
+          </a:p>
+          <a:p>
+            <a:pPr algn="l">
+              <a:spcAft>
+                <a:spcPts val="400"/>
+              </a:spcAft>
+            </a:pPr>
+            <a:r>
+              <a:rPr sz="1019" b="0">
                 <a:solidFill>
                   <a:srgbClr val="0F172A"/>
                 </a:solidFill>
                 <a:latin typeface="Microsoft JhengHei"/>
               </a:rPr>
-              <a:t>   將「Use Webhook」開關設為 Enabled，確保 LINE 即時轉發事件。</a:t>
-            </a:r>
-          </a:p>
-          <a:p>
-            <a:pPr algn="l">
-              <a:spcAft>
-                <a:spcPts val="400"/>
-              </a:spcAft>
-            </a:pPr>
-            <a:r>
-              <a:rPr sz="1050" b="0">
+              <a:t>   填入 HTTPS 網址 + /callback 路徑，開啟「Use Webhook」即時轉發文字與圖片事件。</a:t>
+            </a:r>
+          </a:p>
+          <a:p>
+            <a:pPr algn="l">
+              <a:spcAft>
+                <a:spcPts val="400"/>
+              </a:spcAft>
+            </a:pPr>
+            <a:r>
+              <a:rPr sz="1019" b="0">
                 <a:solidFill>
                   <a:srgbClr val="0F172A"/>
                 </a:solidFill>
@@ -9745,77 +9761,29 @@
               </a:spcAft>
             </a:pPr>
             <a:r>
-              <a:rPr sz="1050" b="0">
+              <a:rPr sz="1019" b="0">
                 <a:solidFill>
                   <a:srgbClr val="0F172A"/>
                 </a:solidFill>
                 <a:latin typeface="Microsoft JhengHei"/>
               </a:rPr>
-              <a:t>3. Channel Access Token (Long-lived)：</a:t>
-            </a:r>
-          </a:p>
-          <a:p>
-            <a:pPr algn="l">
-              <a:spcAft>
-                <a:spcPts val="400"/>
-              </a:spcAft>
-            </a:pPr>
-            <a:r>
-              <a:rPr sz="1050" b="0">
+              <a:t>3. Channel Access Token &amp; Secret：</a:t>
+            </a:r>
+          </a:p>
+          <a:p>
+            <a:pPr algn="l">
+              <a:spcAft>
+                <a:spcPts val="400"/>
+              </a:spcAft>
+            </a:pPr>
+            <a:r>
+              <a:rPr sz="1019" b="0">
                 <a:solidFill>
                   <a:srgbClr val="0F172A"/>
                 </a:solidFill>
                 <a:latin typeface="Microsoft JhengHei"/>
               </a:rPr>
-              <a:t>   發行長期權杖，供 FastAPI 呼叫 LINE Reply API。</a:t>
-            </a:r>
-          </a:p>
-          <a:p>
-            <a:pPr algn="l">
-              <a:spcAft>
-                <a:spcPts val="400"/>
-              </a:spcAft>
-            </a:pPr>
-            <a:r>
-              <a:rPr sz="1050" b="0">
-                <a:solidFill>
-                  <a:srgbClr val="0F172A"/>
-                </a:solidFill>
-                <a:latin typeface="Microsoft JhengHei"/>
-              </a:rPr>
-              <a:t/>
-            </a:r>
-          </a:p>
-          <a:p>
-            <a:pPr algn="l">
-              <a:spcAft>
-                <a:spcPts val="400"/>
-              </a:spcAft>
-            </a:pPr>
-            <a:r>
-              <a:rPr sz="1050" b="0">
-                <a:solidFill>
-                  <a:srgbClr val="0F172A"/>
-                </a:solidFill>
-                <a:latin typeface="Microsoft JhengHei"/>
-              </a:rPr>
-              <a:t>4. Channel Secret 金鑰驗證：</a:t>
-            </a:r>
-          </a:p>
-          <a:p>
-            <a:pPr algn="l">
-              <a:spcAft>
-                <a:spcPts val="400"/>
-              </a:spcAft>
-            </a:pPr>
-            <a:r>
-              <a:rPr sz="1050" b="0">
-                <a:solidFill>
-                  <a:srgbClr val="0F172A"/>
-                </a:solidFill>
-                <a:latin typeface="Microsoft JhengHei"/>
-              </a:rPr>
-              <a:t>   伺服器端比對 X-Line-Signature 雜湊值，拒絕未授權存取。</a:t>
+              <a:t>   透過長期權杖讀取圖片內容並推播回覆，以 HMAC-SHA256 驗證簽章防偽。</a:t>
             </a:r>
           </a:p>
         </p:txBody>
@@ -10428,7 +10396,7 @@
                 </a:solidFill>
                 <a:latin typeface="Microsoft JhengHei"/>
               </a:rPr>
-              <a:t>• 雲端容器化自動建置 Python 3 + FastAPI 伺服器。</a:t>
+              <a:t>• 雲端容器化自動建置 Python 3 + FastAPI + RapidOCR。</a:t>
             </a:r>
           </a:p>
           <a:p>
@@ -10524,7 +10492,7 @@
                 </a:solidFill>
                 <a:latin typeface="Microsoft JhengHei"/>
               </a:rPr>
-              <a:t>• 💰 零成本運行：支援 Free Tier 免費雲端方案。</a:t>
+              <a:t>• 💰 零成本運行：內建本地 RapidOCR 不消耗付費 API 配額。</a:t>
             </a:r>
           </a:p>
         </p:txBody>
@@ -11055,23 +11023,23 @@
                 </a:solidFill>
                 <a:latin typeface="Microsoft JhengHei"/>
               </a:rPr>
+              <a:t>• 自動安裝 FastAPI 與 rapidocr-onnxruntime</a:t>
+            </a:r>
+          </a:p>
+          <a:p>
+            <a:pPr algn="l">
+              <a:spcAft>
+                <a:spcPts val="400"/>
+              </a:spcAft>
+            </a:pPr>
+            <a:r>
+              <a:rPr sz="1050" b="0">
+                <a:solidFill>
+                  <a:srgbClr val="0F172A"/>
+                </a:solidFill>
+                <a:latin typeface="Microsoft JhengHei"/>
+              </a:rPr>
               <a:t>• Start: uvicorn line_bot_server:app</a:t>
-            </a:r>
-          </a:p>
-          <a:p>
-            <a:pPr algn="l">
-              <a:spcAft>
-                <a:spcPts val="400"/>
-              </a:spcAft>
-            </a:pPr>
-            <a:r>
-              <a:rPr sz="1050" b="0">
-                <a:solidFill>
-                  <a:srgbClr val="0F172A"/>
-                </a:solidFill>
-                <a:latin typeface="Microsoft JhengHei"/>
-              </a:rPr>
-              <a:t>• 選擇 Free 免費方案 ($0/月)</a:t>
             </a:r>
           </a:p>
         </p:txBody>
@@ -11242,7 +11210,7 @@
                 </a:solidFill>
                 <a:latin typeface="Microsoft JhengHei"/>
               </a:rPr>
-              <a:t>• GEMINI_API_KEY (雲端隔離保護)</a:t>
+              <a:t>• GEMINI_API_KEY (搭配本地 OCR 雙保障)</a:t>
             </a:r>
           </a:p>
         </p:txBody>
@@ -11505,7 +11473,7 @@
                 </a:solidFill>
                 <a:latin typeface="Arial"/>
               </a:rPr>
-              <a:t>FEATURES &amp; FORMATTING</a:t>
+              <a:t>FEATURES &amp; SCAM FORENSICS</a:t>
             </a:r>
           </a:p>
         </p:txBody>
@@ -11544,7 +11512,7 @@
                 </a:solidFill>
                 <a:latin typeface="Microsoft JhengHei"/>
               </a:rPr>
-              <a:t>核心功能設計：秒級結構化防詐鑑識報告</a:t>
+              <a:t>核心功能設計：最新實戰詐騙破綻秒級拆解</a:t>
             </a:r>
           </a:p>
         </p:txBody>
@@ -11583,7 +11551,7 @@
                 </a:solidFill>
                 <a:latin typeface="Microsoft JhengHei"/>
               </a:rPr>
-              <a:t>針對手機螢幕寬度與使用者心理精心調校的訊息格式與分段排版</a:t>
+              <a:t>針對台灣高發之木馬簡訊、斜線路徑偽裝、拉票盜號與 iMessage 引流提供精準鑑識</a:t>
             </a:r>
           </a:p>
         </p:txBody>
@@ -11702,7 +11670,7 @@
                 </a:solidFill>
                 <a:latin typeface="Microsoft JhengHei"/>
               </a:rPr>
-              <a:t>🔴 風險等級與燈號評分</a:t>
+              <a:t>🔴 網域與路徑偽裝識破</a:t>
             </a:r>
           </a:p>
         </p:txBody>
@@ -11735,13 +11703,13 @@
               </a:spcAft>
             </a:pPr>
             <a:r>
-              <a:rPr sz="1100" b="0">
+              <a:rPr sz="1050" b="0">
                 <a:solidFill>
                   <a:srgbClr val="0F172A"/>
                 </a:solidFill>
                 <a:latin typeface="Microsoft JhengHei"/>
               </a:rPr>
-              <a:t>• 🟢 低風險 (0-30分)：正常促銷/官方通知</a:t>
+              <a:t>• 識破斜線路徑偽裝 (`t.ly/mvdis.gov.tw`)</a:t>
             </a:r>
           </a:p>
           <a:p>
@@ -11751,13 +11719,13 @@
               </a:spcAft>
             </a:pPr>
             <a:r>
-              <a:rPr sz="1100" b="0">
+              <a:rPr sz="1050" b="0">
                 <a:solidFill>
                   <a:srgbClr val="0F172A"/>
                 </a:solidFill>
                 <a:latin typeface="Microsoft JhengHei"/>
               </a:rPr>
-              <a:t>• 🟡 中風險 (31-70分)：可疑話術/要求私下交易</a:t>
+              <a:t>• 攔截 `.top / .vip` 繪畫比賽投票釣魚盜號</a:t>
             </a:r>
           </a:p>
           <a:p>
@@ -11767,13 +11735,13 @@
               </a:spcAft>
             </a:pPr>
             <a:r>
-              <a:rPr sz="1100" b="0">
+              <a:rPr sz="1050" b="0">
                 <a:solidFill>
                   <a:srgbClr val="0F172A"/>
                 </a:solidFill>
                 <a:latin typeface="Microsoft JhengHei"/>
               </a:rPr>
-              <a:t>• 🔴 高風險 (71-100分)：假冒檢警/釣魚連結</a:t>
+              <a:t>• 攔截已停用公開縮網址 (`goo.gl` 黑貓簽收單與聚會照片木馬病毒)</a:t>
             </a:r>
           </a:p>
         </p:txBody>
@@ -11857,7 +11825,7 @@
                 </a:solidFill>
                 <a:latin typeface="Microsoft JhengHei"/>
               </a:rPr>
-              <a:t>🔍 詐騙特徵與手法拆解</a:t>
+              <a:t>🔍 裝熟引流與變形字拆解</a:t>
             </a:r>
           </a:p>
         </p:txBody>
@@ -11890,13 +11858,13 @@
               </a:spcAft>
             </a:pPr>
             <a:r>
-              <a:rPr sz="1100" b="0">
+              <a:rPr sz="1050" b="0">
                 <a:solidFill>
                   <a:srgbClr val="0F172A"/>
                 </a:solidFill>
                 <a:latin typeface="Microsoft JhengHei"/>
               </a:rPr>
-              <a:t>• 明確指出「急迫性話術」、「未授權短網址」</a:t>
+              <a:t>• 識破境外信箱 (`@126.com`) iMessage 群發</a:t>
             </a:r>
           </a:p>
           <a:p>
@@ -11906,13 +11874,13 @@
               </a:spcAft>
             </a:pPr>
             <a:r>
-              <a:rPr sz="1100" b="0">
+              <a:rPr sz="1050" b="0">
                 <a:solidFill>
                   <a:srgbClr val="0F172A"/>
                 </a:solidFill>
                 <a:latin typeface="Microsoft JhengHei"/>
               </a:rPr>
-              <a:t>• 標註 165 資料庫對應之 15 大詐騙套路</a:t>
+              <a:t>• 識破「把Line刪了嗎？加下我 L1ne」變形字</a:t>
             </a:r>
           </a:p>
           <a:p>
@@ -11922,13 +11890,13 @@
               </a:spcAft>
             </a:pPr>
             <a:r>
-              <a:rPr sz="1100" b="0">
+              <a:rPr sz="1050" b="0">
                 <a:solidFill>
                   <a:srgbClr val="0F172A"/>
                 </a:solidFill>
                 <a:latin typeface="Microsoft JhengHei"/>
               </a:rPr>
-              <a:t>• 條列式拆解話術盲點，助民眾冷靜判斷</a:t>
+              <a:t>• 識破「永豐貸免保人」與「內部漲停票領取代碼」加私人 LINE ID</a:t>
             </a:r>
           </a:p>
         </p:txBody>
@@ -12012,7 +11980,7 @@
                 </a:solidFill>
                 <a:latin typeface="Microsoft JhengHei"/>
               </a:rPr>
-              <a:t>🛡️ 行動指引與查證步驟</a:t>
+              <a:t>🛡️ 180+ 官方白名單與SOP</a:t>
             </a:r>
           </a:p>
         </p:txBody>
@@ -12045,13 +12013,13 @@
               </a:spcAft>
             </a:pPr>
             <a:r>
-              <a:rPr sz="1100" b="0">
+              <a:rPr sz="1050" b="0">
                 <a:solidFill>
                   <a:srgbClr val="0F172A"/>
                 </a:solidFill>
                 <a:latin typeface="Microsoft JhengHei"/>
               </a:rPr>
-              <a:t>• 提供具體查證步驟（如撥打 165 / 官方客服）</a:t>
+              <a:t>• 內建 180+ 政府/金融/人壽/電信/電商白名單</a:t>
             </a:r>
           </a:p>
           <a:p>
@@ -12061,13 +12029,13 @@
               </a:spcAft>
             </a:pPr>
             <a:r>
-              <a:rPr sz="1100" b="0">
+              <a:rPr sz="1050" b="0">
                 <a:solidFill>
                   <a:srgbClr val="0F172A"/>
                 </a:solidFill>
                 <a:latin typeface="Microsoft JhengHei"/>
               </a:rPr>
-              <a:t>• 建議「不點擊、不轉帳、不提供 OTP 密碼」</a:t>
+              <a:t>• 實時追蹤短網址轉址 (`twm5g.co` ➔ `oppay.tw`)</a:t>
             </a:r>
           </a:p>
           <a:p>
@@ -12077,13 +12045,13 @@
               </a:spcAft>
             </a:pPr>
             <a:r>
-              <a:rPr sz="1100" b="0">
+              <a:rPr sz="1050" b="0">
                 <a:solidFill>
                   <a:srgbClr val="0F172A"/>
                 </a:solidFill>
                 <a:latin typeface="Microsoft JhengHei"/>
               </a:rPr>
-              <a:t>• 提供標準安全回應話術範本，避免直接衝突</a:t>
+              <a:t>• 依詐騙類型自動生成「關閉小額付費 / 切勿回覆1」專屬防禦指引</a:t>
             </a:r>
           </a:p>
         </p:txBody>
@@ -12230,7 +12198,7 @@
                 </a:solidFill>
                 <a:latin typeface="Microsoft JhengHei"/>
               </a:rPr>
-              <a:t>真實對話實測：蝦皮官方活動 vs 釣魚假訊息</a:t>
+              <a:t>真實對話與截圖實測：合法官網放行 vs 新型詐騙攔截</a:t>
             </a:r>
           </a:p>
         </p:txBody>
@@ -12269,7 +12237,7 @@
                 </a:solidFill>
                 <a:latin typeface="Microsoft JhengHei"/>
               </a:rPr>
-              <a:t>實機對話截圖驗證：白名單精準放行官方促銷，高敏銳攔截詐騙釣魚</a:t>
+              <a:t>實機驗證：180+ 白名單精準放行台哥大/人壽/蝦皮，高敏銳攔截投票盜號與木馬簡訊</a:t>
             </a:r>
           </a:p>
         </p:txBody>
@@ -12486,7 +12454,7 @@
           <a:p>
             <a:pPr algn="l">
               <a:spcAft>
-                <a:spcPts val="600"/>
+                <a:spcPts val="400"/>
               </a:spcAft>
             </a:pPr>
             <a:r>
@@ -12496,86 +12464,134 @@
                 </a:solidFill>
                 <a:latin typeface="Microsoft JhengHei"/>
               </a:rPr>
-              <a:t>📊 實測案例深度解析與鑑識表現</a:t>
-            </a:r>
-          </a:p>
-          <a:p>
-            <a:pPr algn="l">
-              <a:spcAft>
-                <a:spcPts val="400"/>
-              </a:spcAft>
-            </a:pPr>
-            <a:r>
-              <a:rPr sz="1150" b="1">
+              <a:t>📊 最新實戰案例深度解析與鑑識表現</a:t>
+            </a:r>
+          </a:p>
+          <a:p>
+            <a:pPr algn="l">
+              <a:spcAft>
+                <a:spcPts val="400"/>
+              </a:spcAft>
+            </a:pPr>
+            <a:r>
+              <a:rPr sz="1100" b="1">
                 <a:solidFill>
                   <a:srgbClr val="059669"/>
                 </a:solidFill>
                 <a:latin typeface="Microsoft JhengHei"/>
               </a:rPr>
-              <a:t>【實測案例 A：蝦皮官方促銷短網址 (sho.pe)】</a:t>
-            </a:r>
-          </a:p>
-          <a:p>
-            <a:pPr algn="l">
-              <a:spcAft>
-                <a:spcPts val="400"/>
-              </a:spcAft>
-            </a:pPr>
-            <a:r>
-              <a:rPr sz="1050" b="0">
+              <a:t>【實測 A：台哥大 (twm5g.co) / 法國巴黎人壽 (cardif.com.tw) / 蝦皮 (sho.pe)】</a:t>
+            </a:r>
+          </a:p>
+          <a:p>
+            <a:pPr algn="l">
+              <a:spcAft>
+                <a:spcPts val="400"/>
+              </a:spcAft>
+            </a:pPr>
+            <a:r>
+              <a:rPr sz="1000" b="0">
                 <a:solidFill>
                   <a:srgbClr val="0F172A"/>
                 </a:solidFill>
                 <a:latin typeface="Microsoft JhengHei"/>
               </a:rPr>
-              <a:t>• 輸入：「蝦皮免運券領取 https://sho.pe/shopee-free-shipping」</a:t>
-            </a:r>
-          </a:p>
-          <a:p>
-            <a:pPr algn="l">
-              <a:spcAft>
-                <a:spcPts val="400"/>
-              </a:spcAft>
-            </a:pPr>
-            <a:r>
-              <a:rPr sz="1050" b="0">
+              <a:t>• 系統判定：🟢 安全（評分 5/100）</a:t>
+            </a:r>
+          </a:p>
+          <a:p>
+            <a:pPr algn="l">
+              <a:spcAft>
+                <a:spcPts val="400"/>
+              </a:spcAft>
+            </a:pPr>
+            <a:r>
+              <a:rPr sz="1000" b="0">
                 <a:solidFill>
                   <a:srgbClr val="0F172A"/>
                 </a:solidFill>
                 <a:latin typeface="Microsoft JhengHei"/>
               </a:rPr>
-              <a:t>• 系統判定：🟢 低風險（評分 15/100）</a:t>
-            </a:r>
-          </a:p>
-          <a:p>
-            <a:pPr algn="l">
-              <a:spcAft>
-                <a:spcPts val="400"/>
-              </a:spcAft>
-            </a:pPr>
-            <a:r>
-              <a:rPr sz="1050" b="0">
+              <a:t>• 鑑識結論：實時展開短網址確認跳轉至官方網域 (oppay.tw / .com.tw)，精準放行零誤判！</a:t>
+            </a:r>
+          </a:p>
+          <a:p>
+            <a:pPr algn="l">
+              <a:spcAft>
+                <a:spcPts val="400"/>
+              </a:spcAft>
+            </a:pPr>
+            <a:r>
+              <a:rPr sz="1000" b="0">
                 <a:solidFill>
                   <a:srgbClr val="0F172A"/>
                 </a:solidFill>
                 <a:latin typeface="Microsoft JhengHei"/>
               </a:rPr>
-              <a:t>• 鑑識結論：白名單機制精準辨識官方活動，不誤判、不造成使用者困擾。</a:t>
-            </a:r>
-          </a:p>
-          <a:p>
-            <a:pPr algn="l">
-              <a:spcAft>
-                <a:spcPts val="400"/>
-              </a:spcAft>
-            </a:pPr>
-            <a:r>
-              <a:rPr sz="1050" b="0">
+              <a:t/>
+            </a:r>
+          </a:p>
+          <a:p>
+            <a:pPr algn="l">
+              <a:spcAft>
+                <a:spcPts val="400"/>
+              </a:spcAft>
+            </a:pPr>
+            <a:r>
+              <a:rPr sz="1100" b="1">
+                <a:solidFill>
+                  <a:srgbClr val="DC2626"/>
+                </a:solidFill>
+                <a:latin typeface="Microsoft JhengHei"/>
+              </a:rPr>
+              <a:t>【實測 B：假監理站 (t.ly/mvdis.gov.tw) &amp; 繪畫比賽投票 (t5.clsuenfd5.top)】</a:t>
+            </a:r>
+          </a:p>
+          <a:p>
+            <a:pPr algn="l">
+              <a:spcAft>
+                <a:spcPts val="400"/>
+              </a:spcAft>
+            </a:pPr>
+            <a:r>
+              <a:rPr sz="1000" b="0">
                 <a:solidFill>
                   <a:srgbClr val="0F172A"/>
                 </a:solidFill>
                 <a:latin typeface="Microsoft JhengHei"/>
               </a:rPr>
+              <a:t>• 系統判定：🔴 極度危險（評分 96/100）</a:t>
+            </a:r>
+          </a:p>
+          <a:p>
+            <a:pPr algn="l">
+              <a:spcAft>
+                <a:spcPts val="400"/>
+              </a:spcAft>
+            </a:pPr>
+            <a:r>
+              <a:rPr sz="1000" b="0">
+                <a:solidFill>
+                  <a:srgbClr val="0F172A"/>
+                </a:solidFill>
+                <a:latin typeface="Microsoft JhengHei"/>
+              </a:rPr>
+              <a:t>• 鑑識結論：識破斜線後偽造政府網域與「回復 1 啟動連結」陷阱；攔截假投票盜取 LINE 帳密。</a:t>
+            </a:r>
+          </a:p>
+          <a:p>
+            <a:pPr algn="l">
+              <a:spcAft>
+                <a:spcPts val="400"/>
+              </a:spcAft>
+            </a:pPr>
+            <a:r>
+              <a:rPr sz="1000" b="0">
+                <a:solidFill>
+                  <a:srgbClr val="0F172A"/>
+                </a:solidFill>
+                <a:latin typeface="Microsoft JhengHei"/>
+              </a:rPr>
               <a:t/>
             </a:r>
           </a:p>
@@ -12586,61 +12602,45 @@
               </a:spcAft>
             </a:pPr>
             <a:r>
-              <a:rPr sz="1150" b="1">
+              <a:rPr sz="1100" b="1">
                 <a:solidFill>
                   <a:srgbClr val="DC2626"/>
                 </a:solidFill>
                 <a:latin typeface="Microsoft JhengHei"/>
               </a:rPr>
-              <a:t>【實測案例 B：假冒電商解除分期詐騙話術】</a:t>
-            </a:r>
-          </a:p>
-          <a:p>
-            <a:pPr algn="l">
-              <a:spcAft>
-                <a:spcPts val="400"/>
-              </a:spcAft>
-            </a:pPr>
-            <a:r>
-              <a:rPr sz="1050" b="0">
+              <a:t>【實測 C：木馬病毒簡訊 (goo.gl 黑貓簽收單/聚會照片) &amp; iMessage 引流截圖】</a:t>
+            </a:r>
+          </a:p>
+          <a:p>
+            <a:pPr algn="l">
+              <a:spcAft>
+                <a:spcPts val="400"/>
+              </a:spcAft>
+            </a:pPr>
+            <a:r>
+              <a:rPr sz="1000" b="0">
                 <a:solidFill>
                   <a:srgbClr val="0F172A"/>
                 </a:solidFill>
                 <a:latin typeface="Microsoft JhengHei"/>
               </a:rPr>
-              <a:t>• 輸入：「您好，因系統誤設重複扣款，請點擊連結聯絡客服解除分期」</a:t>
-            </a:r>
-          </a:p>
-          <a:p>
-            <a:pPr algn="l">
-              <a:spcAft>
-                <a:spcPts val="400"/>
-              </a:spcAft>
-            </a:pPr>
-            <a:r>
-              <a:rPr sz="1050" b="0">
+              <a:t>• 系統判定：🔴 極度危險（評分 95~96/100）</a:t>
+            </a:r>
+          </a:p>
+          <a:p>
+            <a:pPr algn="l">
+              <a:spcAft>
+                <a:spcPts val="400"/>
+              </a:spcAft>
+            </a:pPr>
+            <a:r>
+              <a:rPr sz="1000" b="0">
                 <a:solidFill>
                   <a:srgbClr val="0F172A"/>
                 </a:solidFill>
                 <a:latin typeface="Microsoft JhengHei"/>
               </a:rPr>
-              <a:t>• 系統判定：🔴 極高風險（評分 95/100）</a:t>
-            </a:r>
-          </a:p>
-          <a:p>
-            <a:pPr algn="l">
-              <a:spcAft>
-                <a:spcPts val="400"/>
-              </a:spcAft>
-            </a:pPr>
-            <a:r>
-              <a:rPr sz="1050" b="0">
-                <a:solidFill>
-                  <a:srgbClr val="0F172A"/>
-                </a:solidFill>
-                <a:latin typeface="Microsoft JhengHei"/>
-              </a:rPr>
-              <a:t>• 鑑識結論：精準命中 165 第 3 類詐騙套路，警示「官方絕不會要求操作 ATM/網銀解除設定」。</a:t>
+              <a:t>• 鑑識結論：攔截公開短網址 APK 木馬與小額付費盜刷；識破永豐貸/加 L1ne/漲停票截圖。</a:t>
             </a:r>
           </a:p>
         </p:txBody>

--- a/LINE官方防詐機器人_專題簡報.pptx
+++ b/LINE官方防詐機器人_專題簡報.pptx
@@ -3578,7 +3578,7 @@
                 </a:solidFill>
                 <a:latin typeface="Microsoft JhengHei"/>
               </a:rPr>
-              <a:t>🛡️ 180+ 官方白名單</a:t>
+              <a:t>🛡️ 165 官網直連+白名單</a:t>
             </a:r>
           </a:p>
         </p:txBody>
@@ -5527,7 +5527,7 @@
                 </a:solidFill>
                 <a:latin typeface="Microsoft JhengHei"/>
               </a:rPr>
-              <a:t>【實測】180+ 合法企業白名單零誤判</a:t>
+              <a:t>【實測】185+ 合法企業白名單零誤判</a:t>
             </a:r>
           </a:p>
           <a:p>
@@ -11980,7 +11980,7 @@
                 </a:solidFill>
                 <a:latin typeface="Microsoft JhengHei"/>
               </a:rPr>
-              <a:t>🛡️ 180+ 官方白名單與SOP</a:t>
+              <a:t>🛡️ 165 官網直連+白名單與SOP</a:t>
             </a:r>
           </a:p>
         </p:txBody>
@@ -12019,7 +12019,7 @@
                 </a:solidFill>
                 <a:latin typeface="Microsoft JhengHei"/>
               </a:rPr>
-              <a:t>• 內建 180+ 政府/金融/人壽/電信/電商白名單</a:t>
+              <a:t>• 直連 165.npa.gov.tw 實時查驗通報涉詐 LINE ID</a:t>
             </a:r>
           </a:p>
           <a:p>
@@ -12237,7 +12237,7 @@
                 </a:solidFill>
                 <a:latin typeface="Microsoft JhengHei"/>
               </a:rPr>
-              <a:t>實機驗證：180+ 白名單精準放行台哥大/人壽/蝦皮，高敏銳攔截投票盜號與木馬簡訊</a:t>
+              <a:t>實機驗證：精準放行台哥大商城 (twm5g.my) 與 iPAS 考試官網 (bsms.tw)，高敏銳攔截 165 通報帳號</a:t>
             </a:r>
           </a:p>
         </p:txBody>
@@ -12480,7 +12480,7 @@
                 </a:solidFill>
                 <a:latin typeface="Microsoft JhengHei"/>
               </a:rPr>
-              <a:t>【實測 A：台哥大 (twm5g.co) / 法國巴黎人壽 (cardif.com.tw) / 蝦皮 (sho.pe)】</a:t>
+              <a:t>【實測 A：台哥大商城 (twm5g.my) / 經濟部 iPAS 考試 (bsms.tw/oCW9Bo) / 巴黎人壽】</a:t>
             </a:r>
           </a:p>
           <a:p>
